--- a/docs/entropy-epitaph-pitch.pptx
+++ b/docs/entropy-epitaph-pitch.pptx
@@ -15,6 +15,7 @@
     <p:sldId id="263" r:id="rId14"/>
     <p:sldId id="264" r:id="rId15"/>
     <p:sldId id="265" r:id="rId16"/>
+    <p:sldId id="266" r:id="rId17"/>
   </p:sldIdLst>
   <p:sldSz cx="12191695" cy="6858000" type="screen4x3"/>
   <p:notesSz cx="6858000" cy="9144000"/>
@@ -3112,7 +3113,7 @@
             <a:avLst/>
           </a:prstGeom>
           <a:solidFill>
-            <a:srgbClr val="121212"/>
+            <a:srgbClr val="100F0D"/>
           </a:solidFill>
           <a:ln>
             <a:noFill/>
@@ -3156,7 +3157,7 @@
             <a:avLst/>
           </a:prstGeom>
           <a:solidFill>
-            <a:srgbClr val="2A2A26"/>
+            <a:srgbClr val="3A3426"/>
           </a:solidFill>
           <a:ln>
             <a:noFill/>
@@ -3218,7 +3219,7 @@
             <a:r>
               <a:rPr sz="6000" b="1" i="0">
                 <a:solidFill>
-                  <a:srgbClr val="C8C8C0"/>
+                  <a:srgbClr val="D2CDBE"/>
                 </a:solidFill>
                 <a:latin typeface="Microsoft YaHei"/>
                 <a:ea typeface="Microsoft YaHei"/>
@@ -3238,7 +3239,7 @@
             <a:r>
               <a:rPr sz="2200" b="0" i="0">
                 <a:solidFill>
-                  <a:srgbClr val="8A7A5A"/>
+                  <a:srgbClr val="B89A63"/>
                 </a:solidFill>
                 <a:latin typeface="Consolas"/>
                 <a:ea typeface="Consolas"/>
@@ -3258,7 +3259,7 @@
             <a:r>
               <a:rPr sz="2000" b="0" i="0">
                 <a:solidFill>
-                  <a:srgbClr val="C8C8C0"/>
+                  <a:srgbClr val="D2CDBE"/>
                 </a:solidFill>
                 <a:latin typeface="Microsoft YaHei"/>
                 <a:ea typeface="Microsoft YaHei"/>
@@ -3278,7 +3279,7 @@
             <a:r>
               <a:rPr sz="1400" b="0" i="0">
                 <a:solidFill>
-                  <a:srgbClr val="7A7A70"/>
+                  <a:srgbClr val="8A8372"/>
                 </a:solidFill>
                 <a:latin typeface="Consolas"/>
                 <a:ea typeface="Consolas"/>
@@ -3321,7 +3322,7 @@
             <a:r>
               <a:rPr sz="1300" b="0" i="0">
                 <a:solidFill>
-                  <a:srgbClr val="7A7A70"/>
+                  <a:srgbClr val="8A8372"/>
                 </a:solidFill>
                 <a:latin typeface="Microsoft YaHei"/>
                 <a:ea typeface="Microsoft YaHei"/>
@@ -3341,7 +3342,7 @@
             <a:r>
               <a:rPr sz="1200" b="0" i="0">
                 <a:solidFill>
-                  <a:srgbClr val="00C83A"/>
+                  <a:srgbClr val="4AD17A"/>
                 </a:solidFill>
                 <a:latin typeface="Consolas"/>
                 <a:ea typeface="Consolas"/>
@@ -3384,7 +3385,7 @@
             <a:avLst/>
           </a:prstGeom>
           <a:solidFill>
-            <a:srgbClr val="121212"/>
+            <a:srgbClr val="100F0D"/>
           </a:solidFill>
           <a:ln>
             <a:noFill/>
@@ -3421,14 +3422,14 @@
         </p:nvSpPr>
         <p:spPr>
           <a:xfrm>
-            <a:off x="0" y="0"/>
-            <a:ext cx="12191695" cy="38100"/>
+            <a:off x="548640" y="566928"/>
+            <a:ext cx="822960" cy="50800"/>
           </a:xfrm>
           <a:prstGeom prst="rect">
             <a:avLst/>
           </a:prstGeom>
           <a:solidFill>
-            <a:srgbClr val="2A2A26"/>
+            <a:srgbClr val="B89A63"/>
           </a:solidFill>
           <a:ln>
             <a:noFill/>
@@ -3465,8 +3466,160 @@
         </p:nvSpPr>
         <p:spPr>
           <a:xfrm>
-            <a:off x="822960" y="2377440"/>
-            <a:ext cx="10515600" cy="2194560"/>
+            <a:off x="548640" y="685800"/>
+            <a:ext cx="9144000" cy="365760"/>
+          </a:xfrm>
+          <a:prstGeom prst="rect">
+            <a:avLst/>
+          </a:prstGeom>
+          <a:noFill/>
+        </p:spPr>
+        <p:txBody>
+          <a:bodyPr wrap="square" anchor="t" lIns="0" rIns="0" tIns="0" bIns="0">
+            <a:spAutoFit/>
+          </a:bodyPr>
+          <a:lstStyle/>
+          <a:p>
+            <a:pPr algn="l">
+              <a:spcBef>
+                <a:spcPts val="0"/>
+              </a:spcBef>
+              <a:spcAft>
+                <a:spcPts val="600"/>
+              </a:spcAft>
+            </a:pPr>
+            <a:r>
+              <a:rPr sz="1200" b="0" i="0">
+                <a:solidFill>
+                  <a:srgbClr val="B89A63"/>
+                </a:solidFill>
+                <a:latin typeface="Consolas"/>
+                <a:ea typeface="Consolas"/>
+              </a:rPr>
+              <a:t>09  DEMO · 演示数据与现场</a:t>
+            </a:r>
+          </a:p>
+        </p:txBody>
+      </p:sp>
+      <p:sp>
+        <p:nvSpPr>
+          <p:cNvPr id="5" name="TextBox 4"/>
+          <p:cNvSpPr txBox="1"/>
+          <p:nvPr/>
+        </p:nvSpPr>
+        <p:spPr>
+          <a:xfrm>
+            <a:off x="548640" y="960120"/>
+            <a:ext cx="11064240" cy="1005840"/>
+          </a:xfrm>
+          <a:prstGeom prst="rect">
+            <a:avLst/>
+          </a:prstGeom>
+          <a:noFill/>
+        </p:spPr>
+        <p:txBody>
+          <a:bodyPr wrap="square" anchor="t" lIns="0" rIns="0" tIns="0" bIns="0">
+            <a:spAutoFit/>
+          </a:bodyPr>
+          <a:lstStyle/>
+          <a:p>
+            <a:pPr algn="l">
+              <a:spcBef>
+                <a:spcPts val="0"/>
+              </a:spcBef>
+              <a:spcAft>
+                <a:spcPts val="600"/>
+              </a:spcAft>
+            </a:pPr>
+            <a:r>
+              <a:rPr sz="3000" b="1" i="0">
+                <a:solidFill>
+                  <a:srgbClr val="D2CDBE"/>
+                </a:solidFill>
+                <a:latin typeface="Microsoft YaHei"/>
+                <a:ea typeface="Microsoft YaHei"/>
+              </a:rPr>
+              <a:t>125 块碑，均衡覆盖，开箱即演</a:t>
+            </a:r>
+          </a:p>
+          <a:p>
+            <a:pPr algn="l">
+              <a:spcBef>
+                <a:spcPts val="200"/>
+              </a:spcBef>
+              <a:spcAft>
+                <a:spcPts val="600"/>
+              </a:spcAft>
+            </a:pPr>
+            <a:r>
+              <a:rPr sz="1400" b="0" i="0">
+                <a:solidFill>
+                  <a:srgbClr val="8A8372"/>
+                </a:solidFill>
+                <a:latin typeface="Consolas"/>
+                <a:ea typeface="Consolas"/>
+              </a:rPr>
+              <a:t>125 monuments, balanced coverage, ready to demo</a:t>
+            </a:r>
+          </a:p>
+        </p:txBody>
+      </p:sp>
+      <p:sp>
+        <p:nvSpPr>
+          <p:cNvPr id="6" name="Rectangle 5"/>
+          <p:cNvSpPr/>
+          <p:nvPr/>
+        </p:nvSpPr>
+        <p:spPr>
+          <a:xfrm>
+            <a:off x="548640" y="2331720"/>
+            <a:ext cx="950976" cy="1371600"/>
+          </a:xfrm>
+          <a:prstGeom prst="rect">
+            <a:avLst/>
+          </a:prstGeom>
+          <a:solidFill>
+            <a:srgbClr val="1C1A16"/>
+          </a:solidFill>
+          <a:ln w="9525">
+            <a:solidFill>
+              <a:srgbClr val="3A3426"/>
+            </a:solidFill>
+          </a:ln>
+          <a:effectLst/>
+        </p:spPr>
+        <p:style>
+          <a:lnRef idx="1">
+            <a:schemeClr val="accent1"/>
+          </a:lnRef>
+          <a:fillRef idx="3">
+            <a:schemeClr val="accent1"/>
+          </a:fillRef>
+          <a:effectRef idx="2">
+            <a:schemeClr val="accent1"/>
+          </a:effectRef>
+          <a:fontRef idx="minor">
+            <a:schemeClr val="lt1"/>
+          </a:fontRef>
+        </p:style>
+        <p:txBody>
+          <a:bodyPr rtlCol="0" anchor="ctr"/>
+          <a:lstStyle/>
+          <a:p>
+            <a:pPr algn="ctr"/>
+          </a:p>
+        </p:txBody>
+      </p:sp>
+      <p:sp>
+        <p:nvSpPr>
+          <p:cNvPr id="7" name="TextBox 6"/>
+          <p:cNvSpPr txBox="1"/>
+          <p:nvPr/>
+        </p:nvSpPr>
+        <p:spPr>
+          <a:xfrm>
+            <a:off x="548640" y="2514600"/>
+            <a:ext cx="950976" cy="1005840"/>
           </a:xfrm>
           <a:prstGeom prst="rect">
             <a:avLst/>
@@ -3479,7 +3632,7 @@
           </a:bodyPr>
           <a:lstStyle/>
           <a:p>
-            <a:pPr algn="l">
+            <a:pPr algn="ctr">
               <a:spcBef>
                 <a:spcPts val="0"/>
               </a:spcBef>
@@ -3488,48 +3641,484 @@
               </a:spcAft>
             </a:pPr>
             <a:r>
-              <a:rPr sz="4000" b="1" i="0">
-                <a:solidFill>
-                  <a:srgbClr val="C8C8C0"/>
+              <a:rPr sz="2400" b="1" i="0">
+                <a:solidFill>
+                  <a:srgbClr val="B89A63"/>
+                </a:solidFill>
+                <a:latin typeface="Consolas"/>
+                <a:ea typeface="Consolas"/>
+              </a:rPr>
+              <a:t>125</a:t>
+            </a:r>
+          </a:p>
+          <a:p>
+            <a:pPr algn="ctr">
+              <a:spcBef>
+                <a:spcPts val="400"/>
+              </a:spcBef>
+              <a:spcAft>
+                <a:spcPts val="600"/>
+              </a:spcAft>
+            </a:pPr>
+            <a:r>
+              <a:rPr sz="900" b="0" i="0">
+                <a:solidFill>
+                  <a:srgbClr val="8A8372"/>
                 </a:solidFill>
                 <a:latin typeface="Microsoft YaHei"/>
                 <a:ea typeface="Microsoft YaHei"/>
               </a:rPr>
-              <a:t>我们不做备份，我们做告别。</a:t>
-            </a:r>
-          </a:p>
-          <a:p>
-            <a:pPr algn="l">
-              <a:spcBef>
-                <a:spcPts val="1400"/>
-              </a:spcBef>
-              <a:spcAft>
-                <a:spcPts val="600"/>
-              </a:spcAft>
-            </a:pPr>
-            <a:r>
-              <a:rPr sz="2000" b="0" i="0">
-                <a:solidFill>
-                  <a:srgbClr val="8A7A5A"/>
+              <a:t>总墓碑 Monuments</a:t>
+            </a:r>
+          </a:p>
+        </p:txBody>
+      </p:sp>
+      <p:sp>
+        <p:nvSpPr>
+          <p:cNvPr id="8" name="Rectangle 7"/>
+          <p:cNvSpPr/>
+          <p:nvPr/>
+        </p:nvSpPr>
+        <p:spPr>
+          <a:xfrm>
+            <a:off x="1682496" y="2331720"/>
+            <a:ext cx="950976" cy="1371600"/>
+          </a:xfrm>
+          <a:prstGeom prst="rect">
+            <a:avLst/>
+          </a:prstGeom>
+          <a:solidFill>
+            <a:srgbClr val="1C1A16"/>
+          </a:solidFill>
+          <a:ln w="9525">
+            <a:solidFill>
+              <a:srgbClr val="3A3426"/>
+            </a:solidFill>
+          </a:ln>
+          <a:effectLst/>
+        </p:spPr>
+        <p:style>
+          <a:lnRef idx="1">
+            <a:schemeClr val="accent1"/>
+          </a:lnRef>
+          <a:fillRef idx="3">
+            <a:schemeClr val="accent1"/>
+          </a:fillRef>
+          <a:effectRef idx="2">
+            <a:schemeClr val="accent1"/>
+          </a:effectRef>
+          <a:fontRef idx="minor">
+            <a:schemeClr val="lt1"/>
+          </a:fontRef>
+        </p:style>
+        <p:txBody>
+          <a:bodyPr rtlCol="0" anchor="ctr"/>
+          <a:lstStyle/>
+          <a:p>
+            <a:pPr algn="ctr"/>
+          </a:p>
+        </p:txBody>
+      </p:sp>
+      <p:sp>
+        <p:nvSpPr>
+          <p:cNvPr id="9" name="TextBox 8"/>
+          <p:cNvSpPr txBox="1"/>
+          <p:nvPr/>
+        </p:nvSpPr>
+        <p:spPr>
+          <a:xfrm>
+            <a:off x="1682496" y="2514600"/>
+            <a:ext cx="950976" cy="1005840"/>
+          </a:xfrm>
+          <a:prstGeom prst="rect">
+            <a:avLst/>
+          </a:prstGeom>
+          <a:noFill/>
+        </p:spPr>
+        <p:txBody>
+          <a:bodyPr wrap="square" anchor="ctr" lIns="0" rIns="0" tIns="0" bIns="0">
+            <a:spAutoFit/>
+          </a:bodyPr>
+          <a:lstStyle/>
+          <a:p>
+            <a:pPr algn="ctr">
+              <a:spcBef>
+                <a:spcPts val="0"/>
+              </a:spcBef>
+              <a:spcAft>
+                <a:spcPts val="600"/>
+              </a:spcAft>
+            </a:pPr>
+            <a:r>
+              <a:rPr sz="2400" b="1" i="0">
+                <a:solidFill>
+                  <a:srgbClr val="B89A63"/>
                 </a:solidFill>
                 <a:latin typeface="Consolas"/>
                 <a:ea typeface="Consolas"/>
               </a:rPr>
-              <a:t>We don't do backups. We do goodbyes.</a:t>
-            </a:r>
-          </a:p>
-        </p:txBody>
-      </p:sp>
-      <p:sp>
-        <p:nvSpPr>
-          <p:cNvPr id="5" name="TextBox 4"/>
+              <a:t>5</a:t>
+            </a:r>
+          </a:p>
+          <a:p>
+            <a:pPr algn="ctr">
+              <a:spcBef>
+                <a:spcPts val="400"/>
+              </a:spcBef>
+              <a:spcAft>
+                <a:spcPts val="600"/>
+              </a:spcAft>
+            </a:pPr>
+            <a:r>
+              <a:rPr sz="900" b="0" i="0">
+                <a:solidFill>
+                  <a:srgbClr val="8A8372"/>
+                </a:solidFill>
+                <a:latin typeface="Microsoft YaHei"/>
+                <a:ea typeface="Microsoft YaHei"/>
+              </a:rPr>
+              <a:t>类型 Types</a:t>
+            </a:r>
+          </a:p>
+        </p:txBody>
+      </p:sp>
+      <p:sp>
+        <p:nvSpPr>
+          <p:cNvPr id="10" name="Rectangle 9"/>
+          <p:cNvSpPr/>
+          <p:nvPr/>
+        </p:nvSpPr>
+        <p:spPr>
+          <a:xfrm>
+            <a:off x="2816352" y="2331720"/>
+            <a:ext cx="950976" cy="1371600"/>
+          </a:xfrm>
+          <a:prstGeom prst="rect">
+            <a:avLst/>
+          </a:prstGeom>
+          <a:solidFill>
+            <a:srgbClr val="1C1A16"/>
+          </a:solidFill>
+          <a:ln w="9525">
+            <a:solidFill>
+              <a:srgbClr val="3A3426"/>
+            </a:solidFill>
+          </a:ln>
+          <a:effectLst/>
+        </p:spPr>
+        <p:style>
+          <a:lnRef idx="1">
+            <a:schemeClr val="accent1"/>
+          </a:lnRef>
+          <a:fillRef idx="3">
+            <a:schemeClr val="accent1"/>
+          </a:fillRef>
+          <a:effectRef idx="2">
+            <a:schemeClr val="accent1"/>
+          </a:effectRef>
+          <a:fontRef idx="minor">
+            <a:schemeClr val="lt1"/>
+          </a:fontRef>
+        </p:style>
+        <p:txBody>
+          <a:bodyPr rtlCol="0" anchor="ctr"/>
+          <a:lstStyle/>
+          <a:p>
+            <a:pPr algn="ctr"/>
+          </a:p>
+        </p:txBody>
+      </p:sp>
+      <p:sp>
+        <p:nvSpPr>
+          <p:cNvPr id="11" name="TextBox 10"/>
           <p:cNvSpPr txBox="1"/>
           <p:nvPr/>
         </p:nvSpPr>
         <p:spPr>
           <a:xfrm>
-            <a:off x="822960" y="5120640"/>
-            <a:ext cx="10515600" cy="914400"/>
+            <a:off x="2816352" y="2514600"/>
+            <a:ext cx="950976" cy="1005840"/>
+          </a:xfrm>
+          <a:prstGeom prst="rect">
+            <a:avLst/>
+          </a:prstGeom>
+          <a:noFill/>
+        </p:spPr>
+        <p:txBody>
+          <a:bodyPr wrap="square" anchor="ctr" lIns="0" rIns="0" tIns="0" bIns="0">
+            <a:spAutoFit/>
+          </a:bodyPr>
+          <a:lstStyle/>
+          <a:p>
+            <a:pPr algn="ctr">
+              <a:spcBef>
+                <a:spcPts val="0"/>
+              </a:spcBef>
+              <a:spcAft>
+                <a:spcPts val="600"/>
+              </a:spcAft>
+            </a:pPr>
+            <a:r>
+              <a:rPr sz="2400" b="1" i="0">
+                <a:solidFill>
+                  <a:srgbClr val="B89A63"/>
+                </a:solidFill>
+                <a:latin typeface="Consolas"/>
+                <a:ea typeface="Consolas"/>
+              </a:rPr>
+              <a:t>5</a:t>
+            </a:r>
+          </a:p>
+          <a:p>
+            <a:pPr algn="ctr">
+              <a:spcBef>
+                <a:spcPts val="400"/>
+              </a:spcBef>
+              <a:spcAft>
+                <a:spcPts val="600"/>
+              </a:spcAft>
+            </a:pPr>
+            <a:r>
+              <a:rPr sz="900" b="0" i="0">
+                <a:solidFill>
+                  <a:srgbClr val="8A8372"/>
+                </a:solidFill>
+                <a:latin typeface="Microsoft YaHei"/>
+                <a:ea typeface="Microsoft YaHei"/>
+              </a:rPr>
+              <a:t>阶段 Stages</a:t>
+            </a:r>
+          </a:p>
+        </p:txBody>
+      </p:sp>
+      <p:sp>
+        <p:nvSpPr>
+          <p:cNvPr id="12" name="Rectangle 11"/>
+          <p:cNvSpPr/>
+          <p:nvPr/>
+        </p:nvSpPr>
+        <p:spPr>
+          <a:xfrm>
+            <a:off x="3950208" y="2331720"/>
+            <a:ext cx="950976" cy="1371600"/>
+          </a:xfrm>
+          <a:prstGeom prst="rect">
+            <a:avLst/>
+          </a:prstGeom>
+          <a:solidFill>
+            <a:srgbClr val="1C1A16"/>
+          </a:solidFill>
+          <a:ln w="9525">
+            <a:solidFill>
+              <a:srgbClr val="3A3426"/>
+            </a:solidFill>
+          </a:ln>
+          <a:effectLst/>
+        </p:spPr>
+        <p:style>
+          <a:lnRef idx="1">
+            <a:schemeClr val="accent1"/>
+          </a:lnRef>
+          <a:fillRef idx="3">
+            <a:schemeClr val="accent1"/>
+          </a:fillRef>
+          <a:effectRef idx="2">
+            <a:schemeClr val="accent1"/>
+          </a:effectRef>
+          <a:fontRef idx="minor">
+            <a:schemeClr val="lt1"/>
+          </a:fontRef>
+        </p:style>
+        <p:txBody>
+          <a:bodyPr rtlCol="0" anchor="ctr"/>
+          <a:lstStyle/>
+          <a:p>
+            <a:pPr algn="ctr"/>
+          </a:p>
+        </p:txBody>
+      </p:sp>
+      <p:sp>
+        <p:nvSpPr>
+          <p:cNvPr id="13" name="TextBox 12"/>
+          <p:cNvSpPr txBox="1"/>
+          <p:nvPr/>
+        </p:nvSpPr>
+        <p:spPr>
+          <a:xfrm>
+            <a:off x="3950208" y="2514600"/>
+            <a:ext cx="950976" cy="1005840"/>
+          </a:xfrm>
+          <a:prstGeom prst="rect">
+            <a:avLst/>
+          </a:prstGeom>
+          <a:noFill/>
+        </p:spPr>
+        <p:txBody>
+          <a:bodyPr wrap="square" anchor="ctr" lIns="0" rIns="0" tIns="0" bIns="0">
+            <a:spAutoFit/>
+          </a:bodyPr>
+          <a:lstStyle/>
+          <a:p>
+            <a:pPr algn="ctr">
+              <a:spcBef>
+                <a:spcPts val="0"/>
+              </a:spcBef>
+              <a:spcAft>
+                <a:spcPts val="600"/>
+              </a:spcAft>
+            </a:pPr>
+            <a:r>
+              <a:rPr sz="2400" b="1" i="0">
+                <a:solidFill>
+                  <a:srgbClr val="B89A63"/>
+                </a:solidFill>
+                <a:latin typeface="Consolas"/>
+                <a:ea typeface="Consolas"/>
+              </a:rPr>
+              <a:t>3</a:t>
+            </a:r>
+          </a:p>
+          <a:p>
+            <a:pPr algn="ctr">
+              <a:spcBef>
+                <a:spcPts val="400"/>
+              </a:spcBef>
+              <a:spcAft>
+                <a:spcPts val="600"/>
+              </a:spcAft>
+            </a:pPr>
+            <a:r>
+              <a:rPr sz="900" b="0" i="0">
+                <a:solidFill>
+                  <a:srgbClr val="8A8372"/>
+                </a:solidFill>
+                <a:latin typeface="Microsoft YaHei"/>
+                <a:ea typeface="Microsoft YaHei"/>
+              </a:rPr>
+              <a:t>文字风格 Styles</a:t>
+            </a:r>
+          </a:p>
+        </p:txBody>
+      </p:sp>
+      <p:sp>
+        <p:nvSpPr>
+          <p:cNvPr id="14" name="Rectangle 13"/>
+          <p:cNvSpPr/>
+          <p:nvPr/>
+        </p:nvSpPr>
+        <p:spPr>
+          <a:xfrm>
+            <a:off x="5084064" y="2331720"/>
+            <a:ext cx="950976" cy="1371600"/>
+          </a:xfrm>
+          <a:prstGeom prst="rect">
+            <a:avLst/>
+          </a:prstGeom>
+          <a:solidFill>
+            <a:srgbClr val="1C1A16"/>
+          </a:solidFill>
+          <a:ln w="9525">
+            <a:solidFill>
+              <a:srgbClr val="3A3426"/>
+            </a:solidFill>
+          </a:ln>
+          <a:effectLst/>
+        </p:spPr>
+        <p:style>
+          <a:lnRef idx="1">
+            <a:schemeClr val="accent1"/>
+          </a:lnRef>
+          <a:fillRef idx="3">
+            <a:schemeClr val="accent1"/>
+          </a:fillRef>
+          <a:effectRef idx="2">
+            <a:schemeClr val="accent1"/>
+          </a:effectRef>
+          <a:fontRef idx="minor">
+            <a:schemeClr val="lt1"/>
+          </a:fontRef>
+        </p:style>
+        <p:txBody>
+          <a:bodyPr rtlCol="0" anchor="ctr"/>
+          <a:lstStyle/>
+          <a:p>
+            <a:pPr algn="ctr"/>
+          </a:p>
+        </p:txBody>
+      </p:sp>
+      <p:sp>
+        <p:nvSpPr>
+          <p:cNvPr id="15" name="TextBox 14"/>
+          <p:cNvSpPr txBox="1"/>
+          <p:nvPr/>
+        </p:nvSpPr>
+        <p:spPr>
+          <a:xfrm>
+            <a:off x="5084064" y="2514600"/>
+            <a:ext cx="950976" cy="1005840"/>
+          </a:xfrm>
+          <a:prstGeom prst="rect">
+            <a:avLst/>
+          </a:prstGeom>
+          <a:noFill/>
+        </p:spPr>
+        <p:txBody>
+          <a:bodyPr wrap="square" anchor="ctr" lIns="0" rIns="0" tIns="0" bIns="0">
+            <a:spAutoFit/>
+          </a:bodyPr>
+          <a:lstStyle/>
+          <a:p>
+            <a:pPr algn="ctr">
+              <a:spcBef>
+                <a:spcPts val="0"/>
+              </a:spcBef>
+              <a:spcAft>
+                <a:spcPts val="600"/>
+              </a:spcAft>
+            </a:pPr>
+            <a:r>
+              <a:rPr sz="2400" b="1" i="0">
+                <a:solidFill>
+                  <a:srgbClr val="B89A63"/>
+                </a:solidFill>
+                <a:latin typeface="Consolas"/>
+                <a:ea typeface="Consolas"/>
+              </a:rPr>
+              <a:t>12</a:t>
+            </a:r>
+          </a:p>
+          <a:p>
+            <a:pPr algn="ctr">
+              <a:spcBef>
+                <a:spcPts val="400"/>
+              </a:spcBef>
+              <a:spcAft>
+                <a:spcPts val="600"/>
+              </a:spcAft>
+            </a:pPr>
+            <a:r>
+              <a:rPr sz="900" b="0" i="0">
+                <a:solidFill>
+                  <a:srgbClr val="8A8372"/>
+                </a:solidFill>
+                <a:latin typeface="Microsoft YaHei"/>
+                <a:ea typeface="Microsoft YaHei"/>
+              </a:rPr>
+              <a:t>消逝凭证 Certs</a:t>
+            </a:r>
+          </a:p>
+        </p:txBody>
+      </p:sp>
+      <p:sp>
+        <p:nvSpPr>
+          <p:cNvPr id="16" name="TextBox 15"/>
+          <p:cNvSpPr txBox="1"/>
+          <p:nvPr/>
+        </p:nvSpPr>
+        <p:spPr>
+          <a:xfrm>
+            <a:off x="548640" y="4023360"/>
+            <a:ext cx="5486400" cy="2377440"/>
           </a:xfrm>
           <a:prstGeom prst="rect">
             <a:avLst/>
@@ -3551,16 +4140,465 @@
               </a:spcAft>
             </a:pPr>
             <a:r>
-              <a:rPr sz="1400" b="0" i="0">
-                <a:solidFill>
-                  <a:srgbClr val="7A7A70"/>
+              <a:rPr sz="1300" b="1" i="0">
+                <a:solidFill>
+                  <a:srgbClr val="D2CDBE"/>
+                </a:solidFill>
+                <a:latin typeface="Microsoft YaHei"/>
+                <a:ea typeface="Microsoft YaHei"/>
+              </a:rPr>
+              <a:t>5 分钟现场路径:</a:t>
+            </a:r>
+          </a:p>
+          <a:p>
+            <a:pPr algn="l">
+              <a:spcBef>
+                <a:spcPts val="800"/>
+              </a:spcBef>
+              <a:spcAft>
+                <a:spcPts val="600"/>
+              </a:spcAft>
+            </a:pPr>
+            <a:r>
+              <a:rPr sz="1100" b="0" i="0">
+                <a:solidFill>
+                  <a:srgbClr val="8A8372"/>
+                </a:solidFill>
+                <a:latin typeface="Microsoft YaHei"/>
+                <a:ea typeface="Microsoft YaHei"/>
+              </a:rPr>
+              <a:t>落地页抛主张 → 浏览不同阶段的碑 → 立一块图片碑 → 开 ×720 演示模式看风化 → 擦拭高熵碑 → 见证崩塌与凭证 → 无名墓区凭吊（碑会短暂变清晰）→ 查看逐渐丢页的档案。</a:t>
+            </a:r>
+          </a:p>
+          <a:p>
+            <a:pPr algn="l">
+              <a:spcBef>
+                <a:spcPts val="1000"/>
+              </a:spcBef>
+              <a:spcAft>
+                <a:spcPts val="600"/>
+              </a:spcAft>
+            </a:pPr>
+            <a:r>
+              <a:rPr sz="1100" b="0" i="0">
+                <a:solidFill>
+                  <a:srgbClr val="4AD17A"/>
                 </a:solidFill>
                 <a:latin typeface="Consolas"/>
                 <a:ea typeface="Consolas"/>
               </a:rPr>
+              <a:t>Live:  h0ll0w-akuzr0guy.github.io/entropy-epitaph</a:t>
+            </a:r>
+          </a:p>
+        </p:txBody>
+      </p:sp>
+      <p:sp>
+        <p:nvSpPr>
+          <p:cNvPr id="17" name="Rectangle 16"/>
+          <p:cNvSpPr/>
+          <p:nvPr/>
+        </p:nvSpPr>
+        <p:spPr>
+          <a:xfrm>
+            <a:off x="6309360" y="2717292"/>
+            <a:ext cx="5330952" cy="3069336"/>
+          </a:xfrm>
+          <a:prstGeom prst="rect">
+            <a:avLst/>
+          </a:prstGeom>
+          <a:noFill/>
+          <a:ln w="12700">
+            <a:solidFill>
+              <a:srgbClr val="3A3426"/>
+            </a:solidFill>
+          </a:ln>
+          <a:effectLst/>
+        </p:spPr>
+        <p:style>
+          <a:lnRef idx="1">
+            <a:schemeClr val="accent1"/>
+          </a:lnRef>
+          <a:fillRef idx="3">
+            <a:schemeClr val="accent1"/>
+          </a:fillRef>
+          <a:effectRef idx="2">
+            <a:schemeClr val="accent1"/>
+          </a:effectRef>
+          <a:fontRef idx="minor">
+            <a:schemeClr val="lt1"/>
+          </a:fontRef>
+        </p:style>
+        <p:txBody>
+          <a:bodyPr rtlCol="0" anchor="ctr"/>
+          <a:lstStyle/>
+          <a:p>
+            <a:pPr algn="ctr"/>
+          </a:p>
+        </p:txBody>
+      </p:sp>
+      <p:pic>
+        <p:nvPicPr>
+          <p:cNvPr id="18" name="Picture 17" descr="archive.png"/>
+          <p:cNvPicPr>
+            <a:picLocks noChangeAspect="1"/>
+          </p:cNvPicPr>
+          <p:nvPr/>
+        </p:nvPicPr>
+        <p:blipFill>
+          <a:blip r:embed="rId2"/>
+          <a:stretch>
+            <a:fillRect/>
+          </a:stretch>
+        </p:blipFill>
+        <p:spPr>
+          <a:xfrm>
+            <a:off x="6309360" y="2717292"/>
+            <a:ext cx="5330952" cy="3069336"/>
+          </a:xfrm>
+          <a:prstGeom prst="rect">
+            <a:avLst/>
+          </a:prstGeom>
+        </p:spPr>
+      </p:pic>
+      <p:sp>
+        <p:nvSpPr>
+          <p:cNvPr id="19" name="TextBox 18"/>
+          <p:cNvSpPr txBox="1"/>
+          <p:nvPr/>
+        </p:nvSpPr>
+        <p:spPr>
+          <a:xfrm>
+            <a:off x="6309360" y="6263640"/>
+            <a:ext cx="5330952" cy="365760"/>
+          </a:xfrm>
+          <a:prstGeom prst="rect">
+            <a:avLst/>
+          </a:prstGeom>
+          <a:noFill/>
+        </p:spPr>
+        <p:txBody>
+          <a:bodyPr wrap="square" anchor="t" lIns="0" rIns="0" tIns="0" bIns="0">
+            <a:spAutoFit/>
+          </a:bodyPr>
+          <a:lstStyle/>
+          <a:p>
+            <a:pPr algn="ctr">
+              <a:spcBef>
+                <a:spcPts val="0"/>
+              </a:spcBef>
+              <a:spcAft>
+                <a:spcPts val="600"/>
+              </a:spcAft>
+            </a:pPr>
+            <a:r>
+              <a:rPr sz="1100" b="0" i="0">
+                <a:solidFill>
+                  <a:srgbClr val="8A8372"/>
+                </a:solidFill>
+                <a:latin typeface="Consolas"/>
+                <a:ea typeface="Consolas"/>
+              </a:rPr>
+              <a:t>消逝档案 · 只剩编号、凭证号与时间</a:t>
+            </a:r>
+          </a:p>
+        </p:txBody>
+      </p:sp>
+      <p:sp>
+        <p:nvSpPr>
+          <p:cNvPr id="20" name="TextBox 19"/>
+          <p:cNvSpPr txBox="1"/>
+          <p:nvPr/>
+        </p:nvSpPr>
+        <p:spPr>
+          <a:xfrm>
+            <a:off x="548640" y="6400800"/>
+            <a:ext cx="7315200" cy="365760"/>
+          </a:xfrm>
+          <a:prstGeom prst="rect">
+            <a:avLst/>
+          </a:prstGeom>
+          <a:noFill/>
+        </p:spPr>
+        <p:txBody>
+          <a:bodyPr wrap="square" anchor="t" lIns="0" rIns="0" tIns="0" bIns="0">
+            <a:spAutoFit/>
+          </a:bodyPr>
+          <a:lstStyle/>
+          <a:p>
+            <a:pPr algn="l">
+              <a:spcBef>
+                <a:spcPts val="0"/>
+              </a:spcBef>
+              <a:spcAft>
+                <a:spcPts val="600"/>
+              </a:spcAft>
+            </a:pPr>
+            <a:r>
+              <a:rPr sz="900" b="0" i="0">
+                <a:solidFill>
+                  <a:srgbClr val="5C564A"/>
+                </a:solidFill>
+                <a:latin typeface="Consolas"/>
+                <a:ea typeface="Consolas"/>
+              </a:rPr>
               <a:t>熵逝碑林 · Entropy Epitaph</a:t>
             </a:r>
           </a:p>
+        </p:txBody>
+      </p:sp>
+      <p:sp>
+        <p:nvSpPr>
+          <p:cNvPr id="21" name="TextBox 20"/>
+          <p:cNvSpPr txBox="1"/>
+          <p:nvPr/>
+        </p:nvSpPr>
+        <p:spPr>
+          <a:xfrm>
+            <a:off x="10607040" y="6400800"/>
+            <a:ext cx="1097280" cy="365760"/>
+          </a:xfrm>
+          <a:prstGeom prst="rect">
+            <a:avLst/>
+          </a:prstGeom>
+          <a:noFill/>
+        </p:spPr>
+        <p:txBody>
+          <a:bodyPr wrap="square" anchor="t" lIns="0" rIns="0" tIns="0" bIns="0">
+            <a:spAutoFit/>
+          </a:bodyPr>
+          <a:lstStyle/>
+          <a:p>
+            <a:pPr algn="r">
+              <a:spcBef>
+                <a:spcPts val="0"/>
+              </a:spcBef>
+              <a:spcAft>
+                <a:spcPts val="600"/>
+              </a:spcAft>
+            </a:pPr>
+            <a:r>
+              <a:rPr sz="900" b="0" i="0">
+                <a:solidFill>
+                  <a:srgbClr val="5C564A"/>
+                </a:solidFill>
+                <a:latin typeface="Consolas"/>
+                <a:ea typeface="Consolas"/>
+              </a:rPr>
+              <a:t>10</a:t>
+            </a:r>
+          </a:p>
+        </p:txBody>
+      </p:sp>
+    </p:spTree>
+  </p:cSld>
+  <p:clrMapOvr>
+    <a:masterClrMapping/>
+  </p:clrMapOvr>
+</p:sld>
+</file>
+
+<file path=ppt/slides/slide11.xml><?xml version="1.0" encoding="utf-8"?>
+<p:sld xmlns:a="http://schemas.openxmlformats.org/drawingml/2006/main" xmlns:p="http://schemas.openxmlformats.org/presentationml/2006/main" xmlns:r="http://schemas.openxmlformats.org/officeDocument/2006/relationships">
+  <p:cSld>
+    <p:spTree>
+      <p:nvGrpSpPr>
+        <p:cNvPr id="1" name=""/>
+        <p:cNvGrpSpPr/>
+        <p:nvPr/>
+      </p:nvGrpSpPr>
+      <p:grpSpPr/>
+      <p:sp>
+        <p:nvSpPr>
+          <p:cNvPr id="2" name="Rectangle 1"/>
+          <p:cNvSpPr/>
+          <p:nvPr/>
+        </p:nvSpPr>
+        <p:spPr>
+          <a:xfrm>
+            <a:off x="0" y="0"/>
+            <a:ext cx="12191695" cy="6858000"/>
+          </a:xfrm>
+          <a:prstGeom prst="rect">
+            <a:avLst/>
+          </a:prstGeom>
+          <a:solidFill>
+            <a:srgbClr val="100F0D"/>
+          </a:solidFill>
+          <a:ln>
+            <a:noFill/>
+          </a:ln>
+          <a:effectLst/>
+        </p:spPr>
+        <p:style>
+          <a:lnRef idx="1">
+            <a:schemeClr val="accent1"/>
+          </a:lnRef>
+          <a:fillRef idx="3">
+            <a:schemeClr val="accent1"/>
+          </a:fillRef>
+          <a:effectRef idx="2">
+            <a:schemeClr val="accent1"/>
+          </a:effectRef>
+          <a:fontRef idx="minor">
+            <a:schemeClr val="lt1"/>
+          </a:fontRef>
+        </p:style>
+        <p:txBody>
+          <a:bodyPr rtlCol="0" anchor="ctr"/>
+          <a:lstStyle/>
+          <a:p>
+            <a:pPr algn="ctr"/>
+          </a:p>
+        </p:txBody>
+      </p:sp>
+      <p:sp>
+        <p:nvSpPr>
+          <p:cNvPr id="3" name="Rectangle 2"/>
+          <p:cNvSpPr/>
+          <p:nvPr/>
+        </p:nvSpPr>
+        <p:spPr>
+          <a:xfrm>
+            <a:off x="0" y="0"/>
+            <a:ext cx="12191695" cy="38100"/>
+          </a:xfrm>
+          <a:prstGeom prst="rect">
+            <a:avLst/>
+          </a:prstGeom>
+          <a:solidFill>
+            <a:srgbClr val="3A3426"/>
+          </a:solidFill>
+          <a:ln>
+            <a:noFill/>
+          </a:ln>
+          <a:effectLst/>
+        </p:spPr>
+        <p:style>
+          <a:lnRef idx="1">
+            <a:schemeClr val="accent1"/>
+          </a:lnRef>
+          <a:fillRef idx="3">
+            <a:schemeClr val="accent1"/>
+          </a:fillRef>
+          <a:effectRef idx="2">
+            <a:schemeClr val="accent1"/>
+          </a:effectRef>
+          <a:fontRef idx="minor">
+            <a:schemeClr val="lt1"/>
+          </a:fontRef>
+        </p:style>
+        <p:txBody>
+          <a:bodyPr rtlCol="0" anchor="ctr"/>
+          <a:lstStyle/>
+          <a:p>
+            <a:pPr algn="ctr"/>
+          </a:p>
+        </p:txBody>
+      </p:sp>
+      <p:sp>
+        <p:nvSpPr>
+          <p:cNvPr id="4" name="TextBox 3"/>
+          <p:cNvSpPr txBox="1"/>
+          <p:nvPr/>
+        </p:nvSpPr>
+        <p:spPr>
+          <a:xfrm>
+            <a:off x="822960" y="2377440"/>
+            <a:ext cx="10515600" cy="2194560"/>
+          </a:xfrm>
+          <a:prstGeom prst="rect">
+            <a:avLst/>
+          </a:prstGeom>
+          <a:noFill/>
+        </p:spPr>
+        <p:txBody>
+          <a:bodyPr wrap="square" anchor="ctr" lIns="0" rIns="0" tIns="0" bIns="0">
+            <a:spAutoFit/>
+          </a:bodyPr>
+          <a:lstStyle/>
+          <a:p>
+            <a:pPr algn="l">
+              <a:spcBef>
+                <a:spcPts val="0"/>
+              </a:spcBef>
+              <a:spcAft>
+                <a:spcPts val="600"/>
+              </a:spcAft>
+            </a:pPr>
+            <a:r>
+              <a:rPr sz="4000" b="1" i="0">
+                <a:solidFill>
+                  <a:srgbClr val="D2CDBE"/>
+                </a:solidFill>
+                <a:latin typeface="Microsoft YaHei"/>
+                <a:ea typeface="Microsoft YaHei"/>
+              </a:rPr>
+              <a:t>我们不做备份，我们做告别。</a:t>
+            </a:r>
+          </a:p>
+          <a:p>
+            <a:pPr algn="l">
+              <a:spcBef>
+                <a:spcPts val="1400"/>
+              </a:spcBef>
+              <a:spcAft>
+                <a:spcPts val="600"/>
+              </a:spcAft>
+            </a:pPr>
+            <a:r>
+              <a:rPr sz="2000" b="0" i="0">
+                <a:solidFill>
+                  <a:srgbClr val="B89A63"/>
+                </a:solidFill>
+                <a:latin typeface="Consolas"/>
+                <a:ea typeface="Consolas"/>
+              </a:rPr>
+              <a:t>We don't do backups. We do goodbyes.</a:t>
+            </a:r>
+          </a:p>
+        </p:txBody>
+      </p:sp>
+      <p:sp>
+        <p:nvSpPr>
+          <p:cNvPr id="5" name="TextBox 4"/>
+          <p:cNvSpPr txBox="1"/>
+          <p:nvPr/>
+        </p:nvSpPr>
+        <p:spPr>
+          <a:xfrm>
+            <a:off x="822960" y="5120640"/>
+            <a:ext cx="10515600" cy="914400"/>
+          </a:xfrm>
+          <a:prstGeom prst="rect">
+            <a:avLst/>
+          </a:prstGeom>
+          <a:noFill/>
+        </p:spPr>
+        <p:txBody>
+          <a:bodyPr wrap="square" anchor="t" lIns="0" rIns="0" tIns="0" bIns="0">
+            <a:spAutoFit/>
+          </a:bodyPr>
+          <a:lstStyle/>
+          <a:p>
+            <a:pPr algn="l">
+              <a:spcBef>
+                <a:spcPts val="0"/>
+              </a:spcBef>
+              <a:spcAft>
+                <a:spcPts val="600"/>
+              </a:spcAft>
+            </a:pPr>
+            <a:r>
+              <a:rPr sz="1400" b="0" i="0">
+                <a:solidFill>
+                  <a:srgbClr val="8A8372"/>
+                </a:solidFill>
+                <a:latin typeface="Consolas"/>
+                <a:ea typeface="Consolas"/>
+              </a:rPr>
+              <a:t>熵逝碑林 · Entropy Epitaph</a:t>
+            </a:r>
+          </a:p>
           <a:p>
             <a:pPr algn="l">
               <a:spcBef>
@@ -3573,7 +4611,7 @@
             <a:r>
               <a:rPr sz="1200" b="0" i="0">
                 <a:solidFill>
-                  <a:srgbClr val="7A7A70"/>
+                  <a:srgbClr val="8A8372"/>
                 </a:solidFill>
                 <a:latin typeface="Consolas"/>
                 <a:ea typeface="Consolas"/>
@@ -3616,7 +4654,7 @@
             <a:avLst/>
           </a:prstGeom>
           <a:solidFill>
-            <a:srgbClr val="121212"/>
+            <a:srgbClr val="100F0D"/>
           </a:solidFill>
           <a:ln>
             <a:noFill/>
@@ -3660,7 +4698,7 @@
             <a:avLst/>
           </a:prstGeom>
           <a:solidFill>
-            <a:srgbClr val="8A7A5A"/>
+            <a:srgbClr val="B89A63"/>
           </a:solidFill>
           <a:ln>
             <a:noFill/>
@@ -3722,7 +4760,7 @@
             <a:r>
               <a:rPr sz="1200" b="0" i="0">
                 <a:solidFill>
-                  <a:srgbClr val="8A7A5A"/>
+                  <a:srgbClr val="B89A63"/>
                 </a:solidFill>
                 <a:latin typeface="Consolas"/>
                 <a:ea typeface="Consolas"/>
@@ -3765,7 +4803,7 @@
             <a:r>
               <a:rPr sz="3000" b="1" i="0">
                 <a:solidFill>
-                  <a:srgbClr val="C8C8C0"/>
+                  <a:srgbClr val="D2CDBE"/>
                 </a:solidFill>
                 <a:latin typeface="Microsoft YaHei"/>
                 <a:ea typeface="Microsoft YaHei"/>
@@ -3785,7 +4823,7 @@
             <a:r>
               <a:rPr sz="1400" b="0" i="0">
                 <a:solidFill>
-                  <a:srgbClr val="7A7A70"/>
+                  <a:srgbClr val="8A8372"/>
                 </a:solidFill>
                 <a:latin typeface="Consolas"/>
                 <a:ea typeface="Consolas"/>
@@ -3828,7 +4866,7 @@
             <a:r>
               <a:rPr sz="1600" b="1" i="0">
                 <a:solidFill>
-                  <a:srgbClr val="C8C8C0"/>
+                  <a:srgbClr val="D2CDBE"/>
                 </a:solidFill>
                 <a:latin typeface="Microsoft YaHei"/>
                 <a:ea typeface="Microsoft YaHei"/>
@@ -3848,7 +4886,7 @@
             <a:r>
               <a:rPr sz="1400" b="0" i="0">
                 <a:solidFill>
-                  <a:srgbClr val="7A7A70"/>
+                  <a:srgbClr val="8A8372"/>
                 </a:solidFill>
                 <a:latin typeface="Microsoft YaHei"/>
                 <a:ea typeface="Microsoft YaHei"/>
@@ -3868,7 +4906,7 @@
             <a:r>
               <a:rPr sz="1400" b="0" i="0">
                 <a:solidFill>
-                  <a:srgbClr val="7A7A70"/>
+                  <a:srgbClr val="8A8372"/>
                 </a:solidFill>
                 <a:latin typeface="Microsoft YaHei"/>
                 <a:ea typeface="Microsoft YaHei"/>
@@ -3888,7 +4926,7 @@
             <a:r>
               <a:rPr sz="1400" b="0" i="0">
                 <a:solidFill>
-                  <a:srgbClr val="7A7A70"/>
+                  <a:srgbClr val="8A8372"/>
                 </a:solidFill>
                 <a:latin typeface="Microsoft YaHei"/>
                 <a:ea typeface="Microsoft YaHei"/>
@@ -3908,7 +4946,7 @@
             <a:r>
               <a:rPr sz="1500" b="0" i="0">
                 <a:solidFill>
-                  <a:srgbClr val="C8C8C0"/>
+                  <a:srgbClr val="D2CDBE"/>
                 </a:solidFill>
                 <a:latin typeface="Microsoft YaHei"/>
                 <a:ea typeface="Microsoft YaHei"/>
@@ -3928,7 +4966,7 @@
             <a:r>
               <a:rPr sz="1300" b="0" i="0">
                 <a:solidFill>
-                  <a:srgbClr val="7A7A70"/>
+                  <a:srgbClr val="8A8372"/>
                 </a:solidFill>
                 <a:latin typeface="Microsoft YaHei"/>
                 <a:ea typeface="Microsoft YaHei"/>
@@ -3953,11 +4991,11 @@
             <a:avLst/>
           </a:prstGeom>
           <a:solidFill>
-            <a:srgbClr val="1E1E1C"/>
+            <a:srgbClr val="1C1A16"/>
           </a:solidFill>
           <a:ln w="9525">
             <a:solidFill>
-              <a:srgbClr val="2A2A26"/>
+              <a:srgbClr val="3A3426"/>
             </a:solidFill>
           </a:ln>
           <a:effectLst/>
@@ -4017,7 +5055,7 @@
             <a:r>
               <a:rPr sz="2000" b="1" i="0">
                 <a:solidFill>
-                  <a:srgbClr val="C8C8C0"/>
+                  <a:srgbClr val="D2CDBE"/>
                 </a:solidFill>
                 <a:latin typeface="Microsoft YaHei"/>
                 <a:ea typeface="Microsoft YaHei"/>
@@ -4037,7 +5075,7 @@
             <a:r>
               <a:rPr sz="2000" b="1" i="0">
                 <a:solidFill>
-                  <a:srgbClr val="C8C8C0"/>
+                  <a:srgbClr val="D2CDBE"/>
                 </a:solidFill>
                 <a:latin typeface="Microsoft YaHei"/>
                 <a:ea typeface="Microsoft YaHei"/>
@@ -4057,7 +5095,7 @@
             <a:r>
               <a:rPr sz="1300" b="0" i="0">
                 <a:solidFill>
-                  <a:srgbClr val="7A7A70"/>
+                  <a:srgbClr val="8A8372"/>
                 </a:solidFill>
                 <a:latin typeface="Consolas"/>
                 <a:ea typeface="Consolas"/>
@@ -4100,7 +5138,7 @@
             <a:r>
               <a:rPr sz="900" b="0" i="0">
                 <a:solidFill>
-                  <a:srgbClr val="5A5A4A"/>
+                  <a:srgbClr val="5C564A"/>
                 </a:solidFill>
                 <a:latin typeface="Consolas"/>
                 <a:ea typeface="Consolas"/>
@@ -4143,7 +5181,7 @@
             <a:r>
               <a:rPr sz="900" b="0" i="0">
                 <a:solidFill>
-                  <a:srgbClr val="5A5A4A"/>
+                  <a:srgbClr val="5C564A"/>
                 </a:solidFill>
                 <a:latin typeface="Consolas"/>
                 <a:ea typeface="Consolas"/>
@@ -4186,7 +5224,7 @@
             <a:avLst/>
           </a:prstGeom>
           <a:solidFill>
-            <a:srgbClr val="121212"/>
+            <a:srgbClr val="100F0D"/>
           </a:solidFill>
           <a:ln>
             <a:noFill/>
@@ -4230,7 +5268,7 @@
             <a:avLst/>
           </a:prstGeom>
           <a:solidFill>
-            <a:srgbClr val="8A7A5A"/>
+            <a:srgbClr val="B89A63"/>
           </a:solidFill>
           <a:ln>
             <a:noFill/>
@@ -4292,7 +5330,7 @@
             <a:r>
               <a:rPr sz="1200" b="0" i="0">
                 <a:solidFill>
-                  <a:srgbClr val="8A7A5A"/>
+                  <a:srgbClr val="B89A63"/>
                 </a:solidFill>
                 <a:latin typeface="Consolas"/>
                 <a:ea typeface="Consolas"/>
@@ -4335,7 +5373,7 @@
             <a:r>
               <a:rPr sz="3000" b="1" i="0">
                 <a:solidFill>
-                  <a:srgbClr val="C8C8C0"/>
+                  <a:srgbClr val="D2CDBE"/>
                 </a:solidFill>
                 <a:latin typeface="Microsoft YaHei"/>
                 <a:ea typeface="Microsoft YaHei"/>
@@ -4355,7 +5393,7 @@
             <a:r>
               <a:rPr sz="1400" b="0" i="0">
                 <a:solidFill>
-                  <a:srgbClr val="7A7A70"/>
+                  <a:srgbClr val="8A8372"/>
                 </a:solidFill>
                 <a:latin typeface="Consolas"/>
                 <a:ea typeface="Consolas"/>
@@ -4380,11 +5418,11 @@
             <a:avLst/>
           </a:prstGeom>
           <a:solidFill>
-            <a:srgbClr val="1E1E1C"/>
+            <a:srgbClr val="1C1A16"/>
           </a:solidFill>
           <a:ln w="9525">
             <a:solidFill>
-              <a:srgbClr val="2A2A26"/>
+              <a:srgbClr val="3A3426"/>
             </a:solidFill>
           </a:ln>
           <a:effectLst/>
@@ -4444,7 +5482,7 @@
             <a:r>
               <a:rPr sz="1800" b="1" i="0">
                 <a:solidFill>
-                  <a:srgbClr val="7A7A70"/>
+                  <a:srgbClr val="8A8372"/>
                 </a:solidFill>
                 <a:latin typeface="Microsoft YaHei"/>
                 <a:ea typeface="Microsoft YaHei"/>
@@ -4464,7 +5502,7 @@
             <a:r>
               <a:rPr sz="1100" b="0" i="0">
                 <a:solidFill>
-                  <a:srgbClr val="7A7A70"/>
+                  <a:srgbClr val="8A8372"/>
                 </a:solidFill>
                 <a:latin typeface="Consolas"/>
                 <a:ea typeface="Consolas"/>
@@ -4484,7 +5522,7 @@
             <a:r>
               <a:rPr sz="1400" b="0" i="0">
                 <a:solidFill>
-                  <a:srgbClr val="5A5A4A"/>
+                  <a:srgbClr val="5C564A"/>
                 </a:solidFill>
                 <a:latin typeface="Microsoft YaHei"/>
                 <a:ea typeface="Microsoft YaHei"/>
@@ -4504,7 +5542,7 @@
             <a:r>
               <a:rPr sz="1400" b="0" i="0">
                 <a:solidFill>
-                  <a:srgbClr val="5A5A4A"/>
+                  <a:srgbClr val="5C564A"/>
                 </a:solidFill>
                 <a:latin typeface="Microsoft YaHei"/>
                 <a:ea typeface="Microsoft YaHei"/>
@@ -4524,7 +5562,7 @@
             <a:r>
               <a:rPr sz="1400" b="0" i="0">
                 <a:solidFill>
-                  <a:srgbClr val="5A5A4A"/>
+                  <a:srgbClr val="5C564A"/>
                 </a:solidFill>
                 <a:latin typeface="Microsoft YaHei"/>
                 <a:ea typeface="Microsoft YaHei"/>
@@ -4549,11 +5587,11 @@
             <a:avLst/>
           </a:prstGeom>
           <a:solidFill>
-            <a:srgbClr val="1E1E1C"/>
+            <a:srgbClr val="1C1A16"/>
           </a:solidFill>
           <a:ln w="9525">
             <a:solidFill>
-              <a:srgbClr val="8A7A5A"/>
+              <a:srgbClr val="B89A63"/>
             </a:solidFill>
           </a:ln>
           <a:effectLst/>
@@ -4613,7 +5651,7 @@
             <a:r>
               <a:rPr sz="1800" b="1" i="0">
                 <a:solidFill>
-                  <a:srgbClr val="C8C8C0"/>
+                  <a:srgbClr val="D2CDBE"/>
                 </a:solidFill>
                 <a:latin typeface="Microsoft YaHei"/>
                 <a:ea typeface="Microsoft YaHei"/>
@@ -4633,7 +5671,7 @@
             <a:r>
               <a:rPr sz="1100" b="0" i="0">
                 <a:solidFill>
-                  <a:srgbClr val="8A7A5A"/>
+                  <a:srgbClr val="B89A63"/>
                 </a:solidFill>
                 <a:latin typeface="Consolas"/>
                 <a:ea typeface="Consolas"/>
@@ -4653,7 +5691,7 @@
             <a:r>
               <a:rPr sz="1400" b="0" i="0">
                 <a:solidFill>
-                  <a:srgbClr val="C8C8C0"/>
+                  <a:srgbClr val="D2CDBE"/>
                 </a:solidFill>
                 <a:latin typeface="Microsoft YaHei"/>
                 <a:ea typeface="Microsoft YaHei"/>
@@ -4673,7 +5711,7 @@
             <a:r>
               <a:rPr sz="1400" b="0" i="0">
                 <a:solidFill>
-                  <a:srgbClr val="C8C8C0"/>
+                  <a:srgbClr val="D2CDBE"/>
                 </a:solidFill>
                 <a:latin typeface="Microsoft YaHei"/>
                 <a:ea typeface="Microsoft YaHei"/>
@@ -4693,7 +5731,7 @@
             <a:r>
               <a:rPr sz="1400" b="0" i="0">
                 <a:solidFill>
-                  <a:srgbClr val="C8C8C0"/>
+                  <a:srgbClr val="D2CDBE"/>
                 </a:solidFill>
                 <a:latin typeface="Microsoft YaHei"/>
                 <a:ea typeface="Microsoft YaHei"/>
@@ -4736,7 +5774,7 @@
             <a:r>
               <a:rPr sz="3600" b="1" i="0">
                 <a:solidFill>
-                  <a:srgbClr val="5A5A4A"/>
+                  <a:srgbClr val="5C564A"/>
                 </a:solidFill>
                 <a:latin typeface="Microsoft YaHei"/>
                 <a:ea typeface="Microsoft YaHei"/>
@@ -4779,7 +5817,7 @@
             <a:r>
               <a:rPr sz="900" b="0" i="0">
                 <a:solidFill>
-                  <a:srgbClr val="5A5A4A"/>
+                  <a:srgbClr val="5C564A"/>
                 </a:solidFill>
                 <a:latin typeface="Consolas"/>
                 <a:ea typeface="Consolas"/>
@@ -4822,7 +5860,7 @@
             <a:r>
               <a:rPr sz="900" b="0" i="0">
                 <a:solidFill>
-                  <a:srgbClr val="5A5A4A"/>
+                  <a:srgbClr val="5C564A"/>
                 </a:solidFill>
                 <a:latin typeface="Consolas"/>
                 <a:ea typeface="Consolas"/>
@@ -4865,7 +5903,7 @@
             <a:avLst/>
           </a:prstGeom>
           <a:solidFill>
-            <a:srgbClr val="121212"/>
+            <a:srgbClr val="100F0D"/>
           </a:solidFill>
           <a:ln>
             <a:noFill/>
@@ -4909,7 +5947,7 @@
             <a:avLst/>
           </a:prstGeom>
           <a:solidFill>
-            <a:srgbClr val="8A7A5A"/>
+            <a:srgbClr val="B89A63"/>
           </a:solidFill>
           <a:ln>
             <a:noFill/>
@@ -4971,7 +6009,7 @@
             <a:r>
               <a:rPr sz="1200" b="0" i="0">
                 <a:solidFill>
-                  <a:srgbClr val="8A7A5A"/>
+                  <a:srgbClr val="B89A63"/>
                 </a:solidFill>
                 <a:latin typeface="Consolas"/>
                 <a:ea typeface="Consolas"/>
@@ -5014,7 +6052,7 @@
             <a:r>
               <a:rPr sz="3000" b="1" i="0">
                 <a:solidFill>
-                  <a:srgbClr val="C8C8C0"/>
+                  <a:srgbClr val="D2CDBE"/>
                 </a:solidFill>
                 <a:latin typeface="Microsoft YaHei"/>
                 <a:ea typeface="Microsoft YaHei"/>
@@ -5034,7 +6072,7 @@
             <a:r>
               <a:rPr sz="1400" b="0" i="0">
                 <a:solidFill>
-                  <a:srgbClr val="7A7A70"/>
+                  <a:srgbClr val="8A8372"/>
                 </a:solidFill>
                 <a:latin typeface="Consolas"/>
                 <a:ea typeface="Consolas"/>
@@ -5059,11 +6097,11 @@
             <a:avLst/>
           </a:prstGeom>
           <a:solidFill>
-            <a:srgbClr val="1E1E1C"/>
+            <a:srgbClr val="1C1A16"/>
           </a:solidFill>
           <a:ln w="9525">
             <a:solidFill>
-              <a:srgbClr val="2A2A26"/>
+              <a:srgbClr val="3A3426"/>
             </a:solidFill>
           </a:ln>
           <a:effectLst/>
@@ -5123,7 +6161,7 @@
             <a:r>
               <a:rPr sz="2400" b="1" i="0">
                 <a:solidFill>
-                  <a:srgbClr val="8A7A5A"/>
+                  <a:srgbClr val="B89A63"/>
                 </a:solidFill>
                 <a:latin typeface="Consolas"/>
                 <a:ea typeface="Consolas"/>
@@ -5143,7 +6181,7 @@
             <a:r>
               <a:rPr sz="2000" b="1" i="0">
                 <a:solidFill>
-                  <a:srgbClr val="C8C8C0"/>
+                  <a:srgbClr val="D2CDBE"/>
                 </a:solidFill>
                 <a:latin typeface="Microsoft YaHei"/>
                 <a:ea typeface="Microsoft YaHei"/>
@@ -5163,7 +6201,7 @@
             <a:r>
               <a:rPr sz="1100" b="0" i="0">
                 <a:solidFill>
-                  <a:srgbClr val="7A7A70"/>
+                  <a:srgbClr val="8A8372"/>
                 </a:solidFill>
                 <a:latin typeface="Consolas"/>
                 <a:ea typeface="Consolas"/>
@@ -5183,7 +6221,7 @@
             <a:r>
               <a:rPr sz="1100" b="0" i="0">
                 <a:solidFill>
-                  <a:srgbClr val="7A7A70"/>
+                  <a:srgbClr val="8A8372"/>
                 </a:solidFill>
                 <a:latin typeface="Microsoft YaHei"/>
                 <a:ea typeface="Microsoft YaHei"/>
@@ -5208,11 +6246,11 @@
             <a:avLst/>
           </a:prstGeom>
           <a:solidFill>
-            <a:srgbClr val="1E1E1C"/>
+            <a:srgbClr val="1C1A16"/>
           </a:solidFill>
           <a:ln w="9525">
             <a:solidFill>
-              <a:srgbClr val="2A2A26"/>
+              <a:srgbClr val="3A3426"/>
             </a:solidFill>
           </a:ln>
           <a:effectLst/>
@@ -5272,7 +6310,7 @@
             <a:r>
               <a:rPr sz="2400" b="1" i="0">
                 <a:solidFill>
-                  <a:srgbClr val="8A7A5A"/>
+                  <a:srgbClr val="B89A63"/>
                 </a:solidFill>
                 <a:latin typeface="Consolas"/>
                 <a:ea typeface="Consolas"/>
@@ -5292,7 +6330,7 @@
             <a:r>
               <a:rPr sz="2000" b="1" i="0">
                 <a:solidFill>
-                  <a:srgbClr val="C8C8C0"/>
+                  <a:srgbClr val="D2CDBE"/>
                 </a:solidFill>
                 <a:latin typeface="Microsoft YaHei"/>
                 <a:ea typeface="Microsoft YaHei"/>
@@ -5312,7 +6350,7 @@
             <a:r>
               <a:rPr sz="1100" b="0" i="0">
                 <a:solidFill>
-                  <a:srgbClr val="7A7A70"/>
+                  <a:srgbClr val="8A8372"/>
                 </a:solidFill>
                 <a:latin typeface="Consolas"/>
                 <a:ea typeface="Consolas"/>
@@ -5332,7 +6370,7 @@
             <a:r>
               <a:rPr sz="1100" b="0" i="0">
                 <a:solidFill>
-                  <a:srgbClr val="7A7A70"/>
+                  <a:srgbClr val="8A8372"/>
                 </a:solidFill>
                 <a:latin typeface="Microsoft YaHei"/>
                 <a:ea typeface="Microsoft YaHei"/>
@@ -5357,11 +6395,11 @@
             <a:avLst/>
           </a:prstGeom>
           <a:solidFill>
-            <a:srgbClr val="1E1E1C"/>
+            <a:srgbClr val="1C1A16"/>
           </a:solidFill>
           <a:ln w="9525">
             <a:solidFill>
-              <a:srgbClr val="2A2A26"/>
+              <a:srgbClr val="3A3426"/>
             </a:solidFill>
           </a:ln>
           <a:effectLst/>
@@ -5421,7 +6459,7 @@
             <a:r>
               <a:rPr sz="2400" b="1" i="0">
                 <a:solidFill>
-                  <a:srgbClr val="8A7A5A"/>
+                  <a:srgbClr val="B89A63"/>
                 </a:solidFill>
                 <a:latin typeface="Consolas"/>
                 <a:ea typeface="Consolas"/>
@@ -5441,7 +6479,7 @@
             <a:r>
               <a:rPr sz="2000" b="1" i="0">
                 <a:solidFill>
-                  <a:srgbClr val="C8C8C0"/>
+                  <a:srgbClr val="D2CDBE"/>
                 </a:solidFill>
                 <a:latin typeface="Microsoft YaHei"/>
                 <a:ea typeface="Microsoft YaHei"/>
@@ -5461,7 +6499,7 @@
             <a:r>
               <a:rPr sz="1100" b="0" i="0">
                 <a:solidFill>
-                  <a:srgbClr val="7A7A70"/>
+                  <a:srgbClr val="8A8372"/>
                 </a:solidFill>
                 <a:latin typeface="Consolas"/>
                 <a:ea typeface="Consolas"/>
@@ -5481,7 +6519,7 @@
             <a:r>
               <a:rPr sz="1100" b="0" i="0">
                 <a:solidFill>
-                  <a:srgbClr val="7A7A70"/>
+                  <a:srgbClr val="8A8372"/>
                 </a:solidFill>
                 <a:latin typeface="Microsoft YaHei"/>
                 <a:ea typeface="Microsoft YaHei"/>
@@ -5506,11 +6544,11 @@
             <a:avLst/>
           </a:prstGeom>
           <a:solidFill>
-            <a:srgbClr val="1E1E1C"/>
+            <a:srgbClr val="1C1A16"/>
           </a:solidFill>
           <a:ln w="9525">
             <a:solidFill>
-              <a:srgbClr val="2A2A26"/>
+              <a:srgbClr val="3A3426"/>
             </a:solidFill>
           </a:ln>
           <a:effectLst/>
@@ -5570,7 +6608,7 @@
             <a:r>
               <a:rPr sz="2400" b="1" i="0">
                 <a:solidFill>
-                  <a:srgbClr val="8A7A5A"/>
+                  <a:srgbClr val="B89A63"/>
                 </a:solidFill>
                 <a:latin typeface="Consolas"/>
                 <a:ea typeface="Consolas"/>
@@ -5590,7 +6628,7 @@
             <a:r>
               <a:rPr sz="2000" b="1" i="0">
                 <a:solidFill>
-                  <a:srgbClr val="C8C8C0"/>
+                  <a:srgbClr val="D2CDBE"/>
                 </a:solidFill>
                 <a:latin typeface="Microsoft YaHei"/>
                 <a:ea typeface="Microsoft YaHei"/>
@@ -5610,7 +6648,7 @@
             <a:r>
               <a:rPr sz="1100" b="0" i="0">
                 <a:solidFill>
-                  <a:srgbClr val="7A7A70"/>
+                  <a:srgbClr val="8A8372"/>
                 </a:solidFill>
                 <a:latin typeface="Consolas"/>
                 <a:ea typeface="Consolas"/>
@@ -5630,7 +6668,7 @@
             <a:r>
               <a:rPr sz="1100" b="0" i="0">
                 <a:solidFill>
-                  <a:srgbClr val="7A7A70"/>
+                  <a:srgbClr val="8A8372"/>
                 </a:solidFill>
                 <a:latin typeface="Microsoft YaHei"/>
                 <a:ea typeface="Microsoft YaHei"/>
@@ -5655,11 +6693,11 @@
             <a:avLst/>
           </a:prstGeom>
           <a:solidFill>
-            <a:srgbClr val="1E1E1C"/>
+            <a:srgbClr val="1C1A16"/>
           </a:solidFill>
           <a:ln w="9525">
             <a:solidFill>
-              <a:srgbClr val="8A7A5A"/>
+              <a:srgbClr val="B89A63"/>
             </a:solidFill>
           </a:ln>
           <a:effectLst/>
@@ -5719,7 +6757,7 @@
             <a:r>
               <a:rPr sz="2400" b="1" i="0">
                 <a:solidFill>
-                  <a:srgbClr val="8A7A5A"/>
+                  <a:srgbClr val="B89A63"/>
                 </a:solidFill>
                 <a:latin typeface="Consolas"/>
                 <a:ea typeface="Consolas"/>
@@ -5739,7 +6777,7 @@
             <a:r>
               <a:rPr sz="2000" b="1" i="0">
                 <a:solidFill>
-                  <a:srgbClr val="C8C8C0"/>
+                  <a:srgbClr val="D2CDBE"/>
                 </a:solidFill>
                 <a:latin typeface="Microsoft YaHei"/>
                 <a:ea typeface="Microsoft YaHei"/>
@@ -5759,7 +6797,7 @@
             <a:r>
               <a:rPr sz="1100" b="0" i="0">
                 <a:solidFill>
-                  <a:srgbClr val="7A7A70"/>
+                  <a:srgbClr val="8A8372"/>
                 </a:solidFill>
                 <a:latin typeface="Consolas"/>
                 <a:ea typeface="Consolas"/>
@@ -5779,7 +6817,7 @@
             <a:r>
               <a:rPr sz="1100" b="0" i="0">
                 <a:solidFill>
-                  <a:srgbClr val="7A7A70"/>
+                  <a:srgbClr val="8A8372"/>
                 </a:solidFill>
                 <a:latin typeface="Microsoft YaHei"/>
                 <a:ea typeface="Microsoft YaHei"/>
@@ -5822,7 +6860,7 @@
             <a:r>
               <a:rPr sz="900" b="0" i="0">
                 <a:solidFill>
-                  <a:srgbClr val="5A5A4A"/>
+                  <a:srgbClr val="5C564A"/>
                 </a:solidFill>
                 <a:latin typeface="Consolas"/>
                 <a:ea typeface="Consolas"/>
@@ -5865,7 +6903,7 @@
             <a:r>
               <a:rPr sz="900" b="0" i="0">
                 <a:solidFill>
-                  <a:srgbClr val="5A5A4A"/>
+                  <a:srgbClr val="5C564A"/>
                 </a:solidFill>
                 <a:latin typeface="Consolas"/>
                 <a:ea typeface="Consolas"/>
@@ -5908,7 +6946,7 @@
             <a:avLst/>
           </a:prstGeom>
           <a:solidFill>
-            <a:srgbClr val="121212"/>
+            <a:srgbClr val="100F0D"/>
           </a:solidFill>
           <a:ln>
             <a:noFill/>
@@ -5952,7 +6990,7 @@
             <a:avLst/>
           </a:prstGeom>
           <a:solidFill>
-            <a:srgbClr val="8A7A5A"/>
+            <a:srgbClr val="B89A63"/>
           </a:solidFill>
           <a:ln>
             <a:noFill/>
@@ -6014,12 +7052,12 @@
             <a:r>
               <a:rPr sz="1200" b="0" i="0">
                 <a:solidFill>
-                  <a:srgbClr val="8A7A5A"/>
+                  <a:srgbClr val="B89A63"/>
                 </a:solidFill>
                 <a:latin typeface="Consolas"/>
                 <a:ea typeface="Consolas"/>
               </a:rPr>
-              <a:t>04  CONTENT · 四类墓碑</a:t>
+              <a:t>04  DECAY · 文字墓碑的演化</a:t>
             </a:r>
           </a:p>
         </p:txBody>
@@ -6057,12 +7095,12 @@
             <a:r>
               <a:rPr sz="3000" b="1" i="0">
                 <a:solidFill>
-                  <a:srgbClr val="C8C8C0"/>
+                  <a:srgbClr val="D2CDBE"/>
                 </a:solidFill>
                 <a:latin typeface="Microsoft YaHei"/>
                 <a:ea typeface="Microsoft YaHei"/>
               </a:rPr>
-              <a:t>为任何「死去」的数字之物立碑</a:t>
+              <a:t>同一段话，五个阶段，逐字腐烂</a:t>
             </a:r>
           </a:p>
           <a:p>
@@ -6077,62 +7115,40 @@
             <a:r>
               <a:rPr sz="1400" b="0" i="0">
                 <a:solidFill>
-                  <a:srgbClr val="7A7A70"/>
+                  <a:srgbClr val="8A8372"/>
                 </a:solidFill>
                 <a:latin typeface="Consolas"/>
                 <a:ea typeface="Consolas"/>
               </a:rPr>
-              <a:t>A tombstone for any dead digital thing</a:t>
-            </a:r>
-          </a:p>
-        </p:txBody>
-      </p:sp>
-      <p:sp>
-        <p:nvSpPr>
-          <p:cNvPr id="6" name="Rectangle 5"/>
-          <p:cNvSpPr/>
-          <p:nvPr/>
-        </p:nvSpPr>
-        <p:spPr>
-          <a:xfrm>
-            <a:off x="548640" y="2331720"/>
-            <a:ext cx="5349240" cy="1783080"/>
-          </a:xfrm>
-          <a:prstGeom prst="rect">
-            <a:avLst/>
-          </a:prstGeom>
-          <a:solidFill>
-            <a:srgbClr val="1E1E1C"/>
-          </a:solidFill>
-          <a:ln w="9525">
-            <a:solidFill>
-              <a:srgbClr val="2A2A26"/>
-            </a:solidFill>
-          </a:ln>
-          <a:effectLst/>
-        </p:spPr>
-        <p:style>
-          <a:lnRef idx="1">
-            <a:schemeClr val="accent1"/>
-          </a:lnRef>
-          <a:fillRef idx="3">
-            <a:schemeClr val="accent1"/>
-          </a:fillRef>
-          <a:effectRef idx="2">
-            <a:schemeClr val="accent1"/>
-          </a:effectRef>
-          <a:fontRef idx="minor">
-            <a:schemeClr val="lt1"/>
-          </a:fontRef>
-        </p:style>
-        <p:txBody>
-          <a:bodyPr rtlCol="0" anchor="ctr"/>
-          <a:lstStyle/>
-          <a:p>
-            <a:pPr algn="ctr"/>
-          </a:p>
-        </p:txBody>
-      </p:sp>
+              <a:t>One sentence, five stages, rotting word by word</a:t>
+            </a:r>
+          </a:p>
+        </p:txBody>
+      </p:sp>
+      <p:pic>
+        <p:nvPicPr>
+          <p:cNvPr id="6" name="Picture 5" descr="evo-text.png"/>
+          <p:cNvPicPr>
+            <a:picLocks noChangeAspect="1"/>
+          </p:cNvPicPr>
+          <p:nvPr/>
+        </p:nvPicPr>
+        <p:blipFill>
+          <a:blip r:embed="rId2"/>
+          <a:stretch>
+            <a:fillRect/>
+          </a:stretch>
+        </p:blipFill>
+        <p:spPr>
+          <a:xfrm>
+            <a:off x="548640" y="2658758"/>
+            <a:ext cx="11091672" cy="2272003"/>
+          </a:xfrm>
+          <a:prstGeom prst="rect">
+            <a:avLst/>
+          </a:prstGeom>
+        </p:spPr>
+      </p:pic>
       <p:sp>
         <p:nvSpPr>
           <p:cNvPr id="7" name="TextBox 6"/>
@@ -6141,8 +7157,8 @@
         </p:nvSpPr>
         <p:spPr>
           <a:xfrm>
-            <a:off x="822960" y="2532888"/>
-            <a:ext cx="4846320" cy="1463040"/>
+            <a:off x="548640" y="5532120"/>
+            <a:ext cx="11064240" cy="914400"/>
           </a:xfrm>
           <a:prstGeom prst="rect">
             <a:avLst/>
@@ -6164,40 +7180,20 @@
               </a:spcAft>
             </a:pPr>
             <a:r>
-              <a:rPr sz="1700" b="1" i="0">
-                <a:solidFill>
-                  <a:srgbClr val="C8C8C0"/>
+              <a:rPr sz="1300" b="0" i="0">
+                <a:solidFill>
+                  <a:srgbClr val="8A8372"/>
                 </a:solidFill>
                 <a:latin typeface="Microsoft YaHei"/>
                 <a:ea typeface="Microsoft YaHei"/>
               </a:rPr>
-              <a:t>代码碑 Code</a:t>
-            </a:r>
-          </a:p>
-          <a:p>
-            <a:pPr algn="l">
-              <a:spcBef>
-                <a:spcPts val="600"/>
-              </a:spcBef>
-              <a:spcAft>
-                <a:spcPts val="600"/>
-              </a:spcAft>
-            </a:pPr>
-            <a:r>
-              <a:rPr sz="1200" b="0" i="0">
-                <a:solidFill>
-                  <a:srgbClr val="7A7A70"/>
-                </a:solidFill>
-                <a:latin typeface="Microsoft YaHei"/>
-                <a:ea typeface="Microsoft YaHei"/>
-              </a:rPr>
-              <a:t>纪念 废弃项目、分支、夭折需求</a:t>
-            </a:r>
-          </a:p>
-          <a:p>
-            <a:pPr algn="l">
-              <a:spcBef>
-                <a:spcPts val="400"/>
+              <a:t>崭新期锐利清晰 → 风化期零星乱码 → 锈蚀期大面积噪声 → 废墟期几不可辨 → 寂灭期只剩一张凭证哈希。</a:t>
+            </a:r>
+          </a:p>
+          <a:p>
+            <a:pPr algn="l">
+              <a:spcBef>
+                <a:spcPts val="600"/>
               </a:spcBef>
               <a:spcAft>
                 <a:spcPts val="600"/>
@@ -6206,72 +7202,26 @@
             <a:r>
               <a:rPr sz="1100" b="0" i="0">
                 <a:solidFill>
-                  <a:srgbClr val="5A5A4A"/>
+                  <a:srgbClr val="5C564A"/>
                 </a:solidFill>
                 <a:latin typeface="Consolas"/>
                 <a:ea typeface="Consolas"/>
               </a:rPr>
-              <a:t>衰变 变量错位 → 注释消失 → 字符碎片</a:t>
-            </a:r>
-          </a:p>
-        </p:txBody>
-      </p:sp>
-      <p:sp>
-        <p:nvSpPr>
-          <p:cNvPr id="8" name="Rectangle 7"/>
-          <p:cNvSpPr/>
-          <p:nvPr/>
-        </p:nvSpPr>
-        <p:spPr>
-          <a:xfrm>
-            <a:off x="6263640" y="2331720"/>
-            <a:ext cx="5349240" cy="1783080"/>
-          </a:xfrm>
-          <a:prstGeom prst="rect">
-            <a:avLst/>
-          </a:prstGeom>
-          <a:solidFill>
-            <a:srgbClr val="1E1E1C"/>
-          </a:solidFill>
-          <a:ln w="9525">
-            <a:solidFill>
-              <a:srgbClr val="2A2A26"/>
-            </a:solidFill>
-          </a:ln>
-          <a:effectLst/>
-        </p:spPr>
-        <p:style>
-          <a:lnRef idx="1">
-            <a:schemeClr val="accent1"/>
-          </a:lnRef>
-          <a:fillRef idx="3">
-            <a:schemeClr val="accent1"/>
-          </a:fillRef>
-          <a:effectRef idx="2">
-            <a:schemeClr val="accent1"/>
-          </a:effectRef>
-          <a:fontRef idx="minor">
-            <a:schemeClr val="lt1"/>
-          </a:fontRef>
-        </p:style>
-        <p:txBody>
-          <a:bodyPr rtlCol="0" anchor="ctr"/>
-          <a:lstStyle/>
-          <a:p>
-            <a:pPr algn="ctr"/>
-          </a:p>
-        </p:txBody>
-      </p:sp>
-      <p:sp>
-        <p:nvSpPr>
-          <p:cNvPr id="9" name="TextBox 8"/>
+              <a:t>Real product capture · ASCII 风格：字符随熵值替换为 ░▒▓╳╬█，颜色从磷光绿退成死灰。</a:t>
+            </a:r>
+          </a:p>
+        </p:txBody>
+      </p:sp>
+      <p:sp>
+        <p:nvSpPr>
+          <p:cNvPr id="8" name="TextBox 7"/>
           <p:cNvSpPr txBox="1"/>
           <p:nvPr/>
         </p:nvSpPr>
         <p:spPr>
           <a:xfrm>
-            <a:off x="6537960" y="2532888"/>
-            <a:ext cx="4846320" cy="1463040"/>
+            <a:off x="548640" y="6400800"/>
+            <a:ext cx="7315200" cy="365760"/>
           </a:xfrm>
           <a:prstGeom prst="rect">
             <a:avLst/>
@@ -6293,114 +7243,28 @@
               </a:spcAft>
             </a:pPr>
             <a:r>
-              <a:rPr sz="1700" b="1" i="0">
-                <a:solidFill>
-                  <a:srgbClr val="C8C8C0"/>
-                </a:solidFill>
-                <a:latin typeface="Microsoft YaHei"/>
-                <a:ea typeface="Microsoft YaHei"/>
-              </a:rPr>
-              <a:t>遗物碑 Relic</a:t>
-            </a:r>
-          </a:p>
-          <a:p>
-            <a:pPr algn="l">
-              <a:spcBef>
-                <a:spcPts val="600"/>
-              </a:spcBef>
-              <a:spcAft>
-                <a:spcPts val="600"/>
-              </a:spcAft>
-            </a:pPr>
-            <a:r>
-              <a:rPr sz="1200" b="0" i="0">
-                <a:solidFill>
-                  <a:srgbClr val="7A7A70"/>
-                </a:solidFill>
-                <a:latin typeface="Microsoft YaHei"/>
-                <a:ea typeface="Microsoft YaHei"/>
-              </a:rPr>
-              <a:t>纪念 关系、梦想、未说出口的话</a:t>
-            </a:r>
-          </a:p>
-          <a:p>
-            <a:pPr algn="l">
-              <a:spcBef>
-                <a:spcPts val="400"/>
-              </a:spcBef>
-              <a:spcAft>
-                <a:spcPts val="600"/>
-              </a:spcAft>
-            </a:pPr>
-            <a:r>
-              <a:rPr sz="1100" b="0" i="0">
-                <a:solidFill>
-                  <a:srgbClr val="5A5A4A"/>
+              <a:rPr sz="900" b="0" i="0">
+                <a:solidFill>
+                  <a:srgbClr val="5C564A"/>
                 </a:solidFill>
                 <a:latin typeface="Consolas"/>
                 <a:ea typeface="Consolas"/>
               </a:rPr>
-              <a:t>衰变 细节模糊 → 段落错乱 → 情绪残影</a:t>
-            </a:r>
-          </a:p>
-        </p:txBody>
-      </p:sp>
-      <p:sp>
-        <p:nvSpPr>
-          <p:cNvPr id="10" name="Rectangle 9"/>
-          <p:cNvSpPr/>
-          <p:nvPr/>
-        </p:nvSpPr>
-        <p:spPr>
-          <a:xfrm>
-            <a:off x="548640" y="4343400"/>
-            <a:ext cx="5349240" cy="1783080"/>
-          </a:xfrm>
-          <a:prstGeom prst="rect">
-            <a:avLst/>
-          </a:prstGeom>
-          <a:solidFill>
-            <a:srgbClr val="1E1E1C"/>
-          </a:solidFill>
-          <a:ln w="9525">
-            <a:solidFill>
-              <a:srgbClr val="2A2A26"/>
-            </a:solidFill>
-          </a:ln>
-          <a:effectLst/>
-        </p:spPr>
-        <p:style>
-          <a:lnRef idx="1">
-            <a:schemeClr val="accent1"/>
-          </a:lnRef>
-          <a:fillRef idx="3">
-            <a:schemeClr val="accent1"/>
-          </a:fillRef>
-          <a:effectRef idx="2">
-            <a:schemeClr val="accent1"/>
-          </a:effectRef>
-          <a:fontRef idx="minor">
-            <a:schemeClr val="lt1"/>
-          </a:fontRef>
-        </p:style>
-        <p:txBody>
-          <a:bodyPr rtlCol="0" anchor="ctr"/>
-          <a:lstStyle/>
-          <a:p>
-            <a:pPr algn="ctr"/>
-          </a:p>
-        </p:txBody>
-      </p:sp>
-      <p:sp>
-        <p:nvSpPr>
-          <p:cNvPr id="11" name="TextBox 10"/>
+              <a:t>熵逝碑林 · Entropy Epitaph</a:t>
+            </a:r>
+          </a:p>
+        </p:txBody>
+      </p:sp>
+      <p:sp>
+        <p:nvSpPr>
+          <p:cNvPr id="9" name="TextBox 8"/>
           <p:cNvSpPr txBox="1"/>
           <p:nvPr/>
         </p:nvSpPr>
         <p:spPr>
           <a:xfrm>
-            <a:off x="822960" y="4544568"/>
-            <a:ext cx="4846320" cy="1463040"/>
+            <a:off x="10607040" y="6400800"/>
+            <a:ext cx="1097280" cy="365760"/>
           </a:xfrm>
           <a:prstGeom prst="rect">
             <a:avLst/>
@@ -6413,7 +7277,7 @@
           </a:bodyPr>
           <a:lstStyle/>
           <a:p>
-            <a:pPr algn="l">
+            <a:pPr algn="r">
               <a:spcBef>
                 <a:spcPts val="0"/>
               </a:spcBef>
@@ -6422,264 +7286,9 @@
               </a:spcAft>
             </a:pPr>
             <a:r>
-              <a:rPr sz="1700" b="1" i="0">
-                <a:solidFill>
-                  <a:srgbClr val="C8C8C0"/>
-                </a:solidFill>
-                <a:latin typeface="Microsoft YaHei"/>
-                <a:ea typeface="Microsoft YaHei"/>
-              </a:rPr>
-              <a:t>链接碑 Link</a:t>
-            </a:r>
-          </a:p>
-          <a:p>
-            <a:pPr algn="l">
-              <a:spcBef>
-                <a:spcPts val="600"/>
-              </a:spcBef>
-              <a:spcAft>
-                <a:spcPts val="600"/>
-              </a:spcAft>
-            </a:pPr>
-            <a:r>
-              <a:rPr sz="1200" b="0" i="0">
-                <a:solidFill>
-                  <a:srgbClr val="7A7A70"/>
-                </a:solidFill>
-                <a:latin typeface="Microsoft YaHei"/>
-                <a:ea typeface="Microsoft YaHei"/>
-              </a:rPr>
-              <a:t>纪念 404 网站、失效链接、死博客</a:t>
-            </a:r>
-          </a:p>
-          <a:p>
-            <a:pPr algn="l">
-              <a:spcBef>
-                <a:spcPts val="400"/>
-              </a:spcBef>
-              <a:spcAft>
-                <a:spcPts val="600"/>
-              </a:spcAft>
-            </a:pPr>
-            <a:r>
-              <a:rPr sz="1100" b="0" i="0">
-                <a:solidFill>
-                  <a:srgbClr val="5A5A4A"/>
-                </a:solidFill>
-                <a:latin typeface="Consolas"/>
-                <a:ea typeface="Consolas"/>
-              </a:rPr>
-              <a:t>衰变 捕获最后快照 → 看它逐渐破碎</a:t>
-            </a:r>
-          </a:p>
-        </p:txBody>
-      </p:sp>
-      <p:sp>
-        <p:nvSpPr>
-          <p:cNvPr id="12" name="Rectangle 11"/>
-          <p:cNvSpPr/>
-          <p:nvPr/>
-        </p:nvSpPr>
-        <p:spPr>
-          <a:xfrm>
-            <a:off x="6263640" y="4343400"/>
-            <a:ext cx="5349240" cy="1783080"/>
-          </a:xfrm>
-          <a:prstGeom prst="rect">
-            <a:avLst/>
-          </a:prstGeom>
-          <a:solidFill>
-            <a:srgbClr val="1E1E1C"/>
-          </a:solidFill>
-          <a:ln w="9525">
-            <a:solidFill>
-              <a:srgbClr val="2A2A26"/>
-            </a:solidFill>
-          </a:ln>
-          <a:effectLst/>
-        </p:spPr>
-        <p:style>
-          <a:lnRef idx="1">
-            <a:schemeClr val="accent1"/>
-          </a:lnRef>
-          <a:fillRef idx="3">
-            <a:schemeClr val="accent1"/>
-          </a:fillRef>
-          <a:effectRef idx="2">
-            <a:schemeClr val="accent1"/>
-          </a:effectRef>
-          <a:fontRef idx="minor">
-            <a:schemeClr val="lt1"/>
-          </a:fontRef>
-        </p:style>
-        <p:txBody>
-          <a:bodyPr rtlCol="0" anchor="ctr"/>
-          <a:lstStyle/>
-          <a:p>
-            <a:pPr algn="ctr"/>
-          </a:p>
-        </p:txBody>
-      </p:sp>
-      <p:sp>
-        <p:nvSpPr>
-          <p:cNvPr id="13" name="TextBox 12"/>
-          <p:cNvSpPr txBox="1"/>
-          <p:nvPr/>
-        </p:nvSpPr>
-        <p:spPr>
-          <a:xfrm>
-            <a:off x="6537960" y="4544568"/>
-            <a:ext cx="4846320" cy="1463040"/>
-          </a:xfrm>
-          <a:prstGeom prst="rect">
-            <a:avLst/>
-          </a:prstGeom>
-          <a:noFill/>
-        </p:spPr>
-        <p:txBody>
-          <a:bodyPr wrap="square" anchor="t" lIns="0" rIns="0" tIns="0" bIns="0">
-            <a:spAutoFit/>
-          </a:bodyPr>
-          <a:lstStyle/>
-          <a:p>
-            <a:pPr algn="l">
-              <a:spcBef>
-                <a:spcPts val="0"/>
-              </a:spcBef>
-              <a:spcAft>
-                <a:spcPts val="600"/>
-              </a:spcAft>
-            </a:pPr>
-            <a:r>
-              <a:rPr sz="1700" b="1" i="0">
-                <a:solidFill>
-                  <a:srgbClr val="C8C8C0"/>
-                </a:solidFill>
-                <a:latin typeface="Microsoft YaHei"/>
-                <a:ea typeface="Microsoft YaHei"/>
-              </a:rPr>
-              <a:t>无名碑 Nameless</a:t>
-            </a:r>
-          </a:p>
-          <a:p>
-            <a:pPr algn="l">
-              <a:spcBef>
-                <a:spcPts val="600"/>
-              </a:spcBef>
-              <a:spcAft>
-                <a:spcPts val="600"/>
-              </a:spcAft>
-            </a:pPr>
-            <a:r>
-              <a:rPr sz="1200" b="0" i="0">
-                <a:solidFill>
-                  <a:srgbClr val="7A7A70"/>
-                </a:solidFill>
-                <a:latin typeface="Microsoft YaHei"/>
-                <a:ea typeface="Microsoft YaHei"/>
-              </a:rPr>
-              <a:t>纪念 不愿说明的事物</a:t>
-            </a:r>
-          </a:p>
-          <a:p>
-            <a:pPr algn="l">
-              <a:spcBef>
-                <a:spcPts val="400"/>
-              </a:spcBef>
-              <a:spcAft>
-                <a:spcPts val="600"/>
-              </a:spcAft>
-            </a:pPr>
-            <a:r>
-              <a:rPr sz="1100" b="0" i="0">
-                <a:solidFill>
-                  <a:srgbClr val="5A5A4A"/>
-                </a:solidFill>
-                <a:latin typeface="Consolas"/>
-                <a:ea typeface="Consolas"/>
-              </a:rPr>
-              <a:t>衰变 没有正文 → 以沉默完成风化</a:t>
-            </a:r>
-          </a:p>
-        </p:txBody>
-      </p:sp>
-      <p:sp>
-        <p:nvSpPr>
-          <p:cNvPr id="14" name="TextBox 13"/>
-          <p:cNvSpPr txBox="1"/>
-          <p:nvPr/>
-        </p:nvSpPr>
-        <p:spPr>
-          <a:xfrm>
-            <a:off x="548640" y="6400800"/>
-            <a:ext cx="7315200" cy="365760"/>
-          </a:xfrm>
-          <a:prstGeom prst="rect">
-            <a:avLst/>
-          </a:prstGeom>
-          <a:noFill/>
-        </p:spPr>
-        <p:txBody>
-          <a:bodyPr wrap="square" anchor="t" lIns="0" rIns="0" tIns="0" bIns="0">
-            <a:spAutoFit/>
-          </a:bodyPr>
-          <a:lstStyle/>
-          <a:p>
-            <a:pPr algn="l">
-              <a:spcBef>
-                <a:spcPts val="0"/>
-              </a:spcBef>
-              <a:spcAft>
-                <a:spcPts val="600"/>
-              </a:spcAft>
-            </a:pPr>
-            <a:r>
               <a:rPr sz="900" b="0" i="0">
                 <a:solidFill>
-                  <a:srgbClr val="5A5A4A"/>
-                </a:solidFill>
-                <a:latin typeface="Consolas"/>
-                <a:ea typeface="Consolas"/>
-              </a:rPr>
-              <a:t>熵逝碑林 · Entropy Epitaph</a:t>
-            </a:r>
-          </a:p>
-        </p:txBody>
-      </p:sp>
-      <p:sp>
-        <p:nvSpPr>
-          <p:cNvPr id="15" name="TextBox 14"/>
-          <p:cNvSpPr txBox="1"/>
-          <p:nvPr/>
-        </p:nvSpPr>
-        <p:spPr>
-          <a:xfrm>
-            <a:off x="10607040" y="6400800"/>
-            <a:ext cx="1097280" cy="365760"/>
-          </a:xfrm>
-          <a:prstGeom prst="rect">
-            <a:avLst/>
-          </a:prstGeom>
-          <a:noFill/>
-        </p:spPr>
-        <p:txBody>
-          <a:bodyPr wrap="square" anchor="t" lIns="0" rIns="0" tIns="0" bIns="0">
-            <a:spAutoFit/>
-          </a:bodyPr>
-          <a:lstStyle/>
-          <a:p>
-            <a:pPr algn="r">
-              <a:spcBef>
-                <a:spcPts val="0"/>
-              </a:spcBef>
-              <a:spcAft>
-                <a:spcPts val="600"/>
-              </a:spcAft>
-            </a:pPr>
-            <a:r>
-              <a:rPr sz="900" b="0" i="0">
-                <a:solidFill>
-                  <a:srgbClr val="5A5A4A"/>
+                  <a:srgbClr val="5C564A"/>
                 </a:solidFill>
                 <a:latin typeface="Consolas"/>
                 <a:ea typeface="Consolas"/>
@@ -6722,7 +7331,7 @@
             <a:avLst/>
           </a:prstGeom>
           <a:solidFill>
-            <a:srgbClr val="121212"/>
+            <a:srgbClr val="100F0D"/>
           </a:solidFill>
           <a:ln>
             <a:noFill/>
@@ -6766,7 +7375,7 @@
             <a:avLst/>
           </a:prstGeom>
           <a:solidFill>
-            <a:srgbClr val="8A7A5A"/>
+            <a:srgbClr val="B89A63"/>
           </a:solidFill>
           <a:ln>
             <a:noFill/>
@@ -6828,12 +7437,12 @@
             <a:r>
               <a:rPr sz="1200" b="0" i="0">
                 <a:solidFill>
-                  <a:srgbClr val="8A7A5A"/>
+                  <a:srgbClr val="B89A63"/>
                 </a:solidFill>
                 <a:latin typeface="Consolas"/>
                 <a:ea typeface="Consolas"/>
               </a:rPr>
-              <a:t>05  DECAY · 五个衰变阶段</a:t>
+              <a:t>05  DECAY · 图片墓碑的演化</a:t>
             </a:r>
           </a:p>
         </p:txBody>
@@ -6871,12 +7480,12 @@
             <a:r>
               <a:rPr sz="3000" b="1" i="0">
                 <a:solidFill>
-                  <a:srgbClr val="C8C8C0"/>
+                  <a:srgbClr val="D2CDBE"/>
                 </a:solidFill>
                 <a:latin typeface="Microsoft YaHei"/>
                 <a:ea typeface="Microsoft YaHei"/>
               </a:rPr>
-              <a:t>内容与载体同步损坏，三种风格锁定</a:t>
+              <a:t>数字影像也是会风化的载体</a:t>
             </a:r>
           </a:p>
           <a:p>
@@ -6891,62 +7500,40 @@
             <a:r>
               <a:rPr sz="1400" b="0" i="0">
                 <a:solidFill>
-                  <a:srgbClr val="7A7A70"/>
+                  <a:srgbClr val="8A8372"/>
                 </a:solidFill>
                 <a:latin typeface="Consolas"/>
                 <a:ea typeface="Consolas"/>
               </a:rPr>
-              <a:t>Content and medium decay together; style is locked at birth</a:t>
-            </a:r>
-          </a:p>
-        </p:txBody>
-      </p:sp>
-      <p:sp>
-        <p:nvSpPr>
-          <p:cNvPr id="6" name="Rectangle 5"/>
-          <p:cNvSpPr/>
-          <p:nvPr/>
-        </p:nvSpPr>
-        <p:spPr>
-          <a:xfrm>
-            <a:off x="548640" y="2423160"/>
-            <a:ext cx="2051913" cy="1828800"/>
-          </a:xfrm>
-          <a:prstGeom prst="rect">
-            <a:avLst/>
-          </a:prstGeom>
-          <a:solidFill>
-            <a:srgbClr val="1E1E1C"/>
-          </a:solidFill>
-          <a:ln w="9525">
-            <a:solidFill>
-              <a:srgbClr val="2A2A26"/>
-            </a:solidFill>
-          </a:ln>
-          <a:effectLst/>
-        </p:spPr>
-        <p:style>
-          <a:lnRef idx="1">
-            <a:schemeClr val="accent1"/>
-          </a:lnRef>
-          <a:fillRef idx="3">
-            <a:schemeClr val="accent1"/>
-          </a:fillRef>
-          <a:effectRef idx="2">
-            <a:schemeClr val="accent1"/>
-          </a:effectRef>
-          <a:fontRef idx="minor">
-            <a:schemeClr val="lt1"/>
-          </a:fontRef>
-        </p:style>
-        <p:txBody>
-          <a:bodyPr rtlCol="0" anchor="ctr"/>
-          <a:lstStyle/>
-          <a:p>
-            <a:pPr algn="ctr"/>
-          </a:p>
-        </p:txBody>
-      </p:sp>
+              <a:t>A digital image is a medium that rots too</a:t>
+            </a:r>
+          </a:p>
+        </p:txBody>
+      </p:sp>
+      <p:pic>
+        <p:nvPicPr>
+          <p:cNvPr id="6" name="Picture 5" descr="evo-image.png"/>
+          <p:cNvPicPr>
+            <a:picLocks noChangeAspect="1"/>
+          </p:cNvPicPr>
+          <p:nvPr/>
+        </p:nvPicPr>
+        <p:blipFill>
+          <a:blip r:embed="rId2"/>
+          <a:stretch>
+            <a:fillRect/>
+          </a:stretch>
+        </p:blipFill>
+        <p:spPr>
+          <a:xfrm>
+            <a:off x="548640" y="2439608"/>
+            <a:ext cx="11091672" cy="2710303"/>
+          </a:xfrm>
+          <a:prstGeom prst="rect">
+            <a:avLst/>
+          </a:prstGeom>
+        </p:spPr>
+      </p:pic>
       <p:sp>
         <p:nvSpPr>
           <p:cNvPr id="7" name="TextBox 6"/>
@@ -6955,507 +7542,8 @@
         </p:nvSpPr>
         <p:spPr>
           <a:xfrm>
-            <a:off x="548640" y="2926080"/>
-            <a:ext cx="2051913" cy="1097280"/>
-          </a:xfrm>
-          <a:prstGeom prst="rect">
-            <a:avLst/>
-          </a:prstGeom>
-          <a:noFill/>
-        </p:spPr>
-        <p:txBody>
-          <a:bodyPr wrap="square" anchor="ctr" lIns="0" rIns="0" tIns="0" bIns="0">
-            <a:spAutoFit/>
-          </a:bodyPr>
-          <a:lstStyle/>
-          <a:p>
-            <a:pPr algn="ctr">
-              <a:spcBef>
-                <a:spcPts val="0"/>
-              </a:spcBef>
-              <a:spcAft>
-                <a:spcPts val="600"/>
-              </a:spcAft>
-            </a:pPr>
-            <a:r>
-              <a:rPr sz="1700" b="1" i="0">
-                <a:solidFill>
-                  <a:srgbClr val="C8C8C0"/>
-                </a:solidFill>
-                <a:latin typeface="Microsoft YaHei"/>
-                <a:ea typeface="Microsoft YaHei"/>
-              </a:rPr>
-              <a:t>崭新期</a:t>
-            </a:r>
-          </a:p>
-          <a:p>
-            <a:pPr algn="ctr">
-              <a:spcBef>
-                <a:spcPts val="600"/>
-              </a:spcBef>
-              <a:spcAft>
-                <a:spcPts val="600"/>
-              </a:spcAft>
-            </a:pPr>
-            <a:r>
-              <a:rPr sz="1100" b="0" i="0">
-                <a:solidFill>
-                  <a:srgbClr val="7A7A70"/>
-                </a:solidFill>
-                <a:latin typeface="Consolas"/>
-                <a:ea typeface="Consolas"/>
-              </a:rPr>
-              <a:t>0 – .20</a:t>
-            </a:r>
-          </a:p>
-        </p:txBody>
-      </p:sp>
-      <p:sp>
-        <p:nvSpPr>
-          <p:cNvPr id="8" name="Rectangle 7"/>
-          <p:cNvSpPr/>
-          <p:nvPr/>
-        </p:nvSpPr>
-        <p:spPr>
-          <a:xfrm>
-            <a:off x="2801721" y="2423160"/>
-            <a:ext cx="2051913" cy="1828800"/>
-          </a:xfrm>
-          <a:prstGeom prst="rect">
-            <a:avLst/>
-          </a:prstGeom>
-          <a:solidFill>
-            <a:srgbClr val="1E1E1C"/>
-          </a:solidFill>
-          <a:ln w="9525">
-            <a:solidFill>
-              <a:srgbClr val="2A2A26"/>
-            </a:solidFill>
-          </a:ln>
-          <a:effectLst/>
-        </p:spPr>
-        <p:style>
-          <a:lnRef idx="1">
-            <a:schemeClr val="accent1"/>
-          </a:lnRef>
-          <a:fillRef idx="3">
-            <a:schemeClr val="accent1"/>
-          </a:fillRef>
-          <a:effectRef idx="2">
-            <a:schemeClr val="accent1"/>
-          </a:effectRef>
-          <a:fontRef idx="minor">
-            <a:schemeClr val="lt1"/>
-          </a:fontRef>
-        </p:style>
-        <p:txBody>
-          <a:bodyPr rtlCol="0" anchor="ctr"/>
-          <a:lstStyle/>
-          <a:p>
-            <a:pPr algn="ctr"/>
-          </a:p>
-        </p:txBody>
-      </p:sp>
-      <p:sp>
-        <p:nvSpPr>
-          <p:cNvPr id="9" name="TextBox 8"/>
-          <p:cNvSpPr txBox="1"/>
-          <p:nvPr/>
-        </p:nvSpPr>
-        <p:spPr>
-          <a:xfrm>
-            <a:off x="2801721" y="2926080"/>
-            <a:ext cx="2051913" cy="1097280"/>
-          </a:xfrm>
-          <a:prstGeom prst="rect">
-            <a:avLst/>
-          </a:prstGeom>
-          <a:noFill/>
-        </p:spPr>
-        <p:txBody>
-          <a:bodyPr wrap="square" anchor="ctr" lIns="0" rIns="0" tIns="0" bIns="0">
-            <a:spAutoFit/>
-          </a:bodyPr>
-          <a:lstStyle/>
-          <a:p>
-            <a:pPr algn="ctr">
-              <a:spcBef>
-                <a:spcPts val="0"/>
-              </a:spcBef>
-              <a:spcAft>
-                <a:spcPts val="600"/>
-              </a:spcAft>
-            </a:pPr>
-            <a:r>
-              <a:rPr sz="1700" b="1" i="0">
-                <a:solidFill>
-                  <a:srgbClr val="A8A89A"/>
-                </a:solidFill>
-                <a:latin typeface="Microsoft YaHei"/>
-                <a:ea typeface="Microsoft YaHei"/>
-              </a:rPr>
-              <a:t>风化期</a:t>
-            </a:r>
-          </a:p>
-          <a:p>
-            <a:pPr algn="ctr">
-              <a:spcBef>
-                <a:spcPts val="600"/>
-              </a:spcBef>
-              <a:spcAft>
-                <a:spcPts val="600"/>
-              </a:spcAft>
-            </a:pPr>
-            <a:r>
-              <a:rPr sz="1100" b="0" i="0">
-                <a:solidFill>
-                  <a:srgbClr val="7A7A70"/>
-                </a:solidFill>
-                <a:latin typeface="Consolas"/>
-                <a:ea typeface="Consolas"/>
-              </a:rPr>
-              <a:t>.20 – .45</a:t>
-            </a:r>
-          </a:p>
-        </p:txBody>
-      </p:sp>
-      <p:sp>
-        <p:nvSpPr>
-          <p:cNvPr id="10" name="Rectangle 9"/>
-          <p:cNvSpPr/>
-          <p:nvPr/>
-        </p:nvSpPr>
-        <p:spPr>
-          <a:xfrm>
-            <a:off x="5054802" y="2423160"/>
-            <a:ext cx="2051913" cy="1828800"/>
-          </a:xfrm>
-          <a:prstGeom prst="rect">
-            <a:avLst/>
-          </a:prstGeom>
-          <a:solidFill>
-            <a:srgbClr val="1E1E1C"/>
-          </a:solidFill>
-          <a:ln w="9525">
-            <a:solidFill>
-              <a:srgbClr val="2A2A26"/>
-            </a:solidFill>
-          </a:ln>
-          <a:effectLst/>
-        </p:spPr>
-        <p:style>
-          <a:lnRef idx="1">
-            <a:schemeClr val="accent1"/>
-          </a:lnRef>
-          <a:fillRef idx="3">
-            <a:schemeClr val="accent1"/>
-          </a:fillRef>
-          <a:effectRef idx="2">
-            <a:schemeClr val="accent1"/>
-          </a:effectRef>
-          <a:fontRef idx="minor">
-            <a:schemeClr val="lt1"/>
-          </a:fontRef>
-        </p:style>
-        <p:txBody>
-          <a:bodyPr rtlCol="0" anchor="ctr"/>
-          <a:lstStyle/>
-          <a:p>
-            <a:pPr algn="ctr"/>
-          </a:p>
-        </p:txBody>
-      </p:sp>
-      <p:sp>
-        <p:nvSpPr>
-          <p:cNvPr id="11" name="TextBox 10"/>
-          <p:cNvSpPr txBox="1"/>
-          <p:nvPr/>
-        </p:nvSpPr>
-        <p:spPr>
-          <a:xfrm>
-            <a:off x="5054802" y="2926080"/>
-            <a:ext cx="2051913" cy="1097280"/>
-          </a:xfrm>
-          <a:prstGeom prst="rect">
-            <a:avLst/>
-          </a:prstGeom>
-          <a:noFill/>
-        </p:spPr>
-        <p:txBody>
-          <a:bodyPr wrap="square" anchor="ctr" lIns="0" rIns="0" tIns="0" bIns="0">
-            <a:spAutoFit/>
-          </a:bodyPr>
-          <a:lstStyle/>
-          <a:p>
-            <a:pPr algn="ctr">
-              <a:spcBef>
-                <a:spcPts val="0"/>
-              </a:spcBef>
-              <a:spcAft>
-                <a:spcPts val="600"/>
-              </a:spcAft>
-            </a:pPr>
-            <a:r>
-              <a:rPr sz="1700" b="1" i="0">
-                <a:solidFill>
-                  <a:srgbClr val="7A7A70"/>
-                </a:solidFill>
-                <a:latin typeface="Microsoft YaHei"/>
-                <a:ea typeface="Microsoft YaHei"/>
-              </a:rPr>
-              <a:t>锈蚀期</a:t>
-            </a:r>
-          </a:p>
-          <a:p>
-            <a:pPr algn="ctr">
-              <a:spcBef>
-                <a:spcPts val="600"/>
-              </a:spcBef>
-              <a:spcAft>
-                <a:spcPts val="600"/>
-              </a:spcAft>
-            </a:pPr>
-            <a:r>
-              <a:rPr sz="1100" b="0" i="0">
-                <a:solidFill>
-                  <a:srgbClr val="7A7A70"/>
-                </a:solidFill>
-                <a:latin typeface="Consolas"/>
-                <a:ea typeface="Consolas"/>
-              </a:rPr>
-              <a:t>.45 – .70</a:t>
-            </a:r>
-          </a:p>
-        </p:txBody>
-      </p:sp>
-      <p:sp>
-        <p:nvSpPr>
-          <p:cNvPr id="12" name="Rectangle 11"/>
-          <p:cNvSpPr/>
-          <p:nvPr/>
-        </p:nvSpPr>
-        <p:spPr>
-          <a:xfrm>
-            <a:off x="7307883" y="2423160"/>
-            <a:ext cx="2051913" cy="1828800"/>
-          </a:xfrm>
-          <a:prstGeom prst="rect">
-            <a:avLst/>
-          </a:prstGeom>
-          <a:solidFill>
-            <a:srgbClr val="1E1E1C"/>
-          </a:solidFill>
-          <a:ln w="9525">
-            <a:solidFill>
-              <a:srgbClr val="2A2A26"/>
-            </a:solidFill>
-          </a:ln>
-          <a:effectLst/>
-        </p:spPr>
-        <p:style>
-          <a:lnRef idx="1">
-            <a:schemeClr val="accent1"/>
-          </a:lnRef>
-          <a:fillRef idx="3">
-            <a:schemeClr val="accent1"/>
-          </a:fillRef>
-          <a:effectRef idx="2">
-            <a:schemeClr val="accent1"/>
-          </a:effectRef>
-          <a:fontRef idx="minor">
-            <a:schemeClr val="lt1"/>
-          </a:fontRef>
-        </p:style>
-        <p:txBody>
-          <a:bodyPr rtlCol="0" anchor="ctr"/>
-          <a:lstStyle/>
-          <a:p>
-            <a:pPr algn="ctr"/>
-          </a:p>
-        </p:txBody>
-      </p:sp>
-      <p:sp>
-        <p:nvSpPr>
-          <p:cNvPr id="13" name="TextBox 12"/>
-          <p:cNvSpPr txBox="1"/>
-          <p:nvPr/>
-        </p:nvSpPr>
-        <p:spPr>
-          <a:xfrm>
-            <a:off x="7307883" y="2926080"/>
-            <a:ext cx="2051913" cy="1097280"/>
-          </a:xfrm>
-          <a:prstGeom prst="rect">
-            <a:avLst/>
-          </a:prstGeom>
-          <a:noFill/>
-        </p:spPr>
-        <p:txBody>
-          <a:bodyPr wrap="square" anchor="ctr" lIns="0" rIns="0" tIns="0" bIns="0">
-            <a:spAutoFit/>
-          </a:bodyPr>
-          <a:lstStyle/>
-          <a:p>
-            <a:pPr algn="ctr">
-              <a:spcBef>
-                <a:spcPts val="0"/>
-              </a:spcBef>
-              <a:spcAft>
-                <a:spcPts val="600"/>
-              </a:spcAft>
-            </a:pPr>
-            <a:r>
-              <a:rPr sz="1700" b="1" i="0">
-                <a:solidFill>
-                  <a:srgbClr val="5A5A4A"/>
-                </a:solidFill>
-                <a:latin typeface="Microsoft YaHei"/>
-                <a:ea typeface="Microsoft YaHei"/>
-              </a:rPr>
-              <a:t>废墟期</a:t>
-            </a:r>
-          </a:p>
-          <a:p>
-            <a:pPr algn="ctr">
-              <a:spcBef>
-                <a:spcPts val="600"/>
-              </a:spcBef>
-              <a:spcAft>
-                <a:spcPts val="600"/>
-              </a:spcAft>
-            </a:pPr>
-            <a:r>
-              <a:rPr sz="1100" b="0" i="0">
-                <a:solidFill>
-                  <a:srgbClr val="7A7A70"/>
-                </a:solidFill>
-                <a:latin typeface="Consolas"/>
-                <a:ea typeface="Consolas"/>
-              </a:rPr>
-              <a:t>.70 – .90</a:t>
-            </a:r>
-          </a:p>
-        </p:txBody>
-      </p:sp>
-      <p:sp>
-        <p:nvSpPr>
-          <p:cNvPr id="14" name="Rectangle 13"/>
-          <p:cNvSpPr/>
-          <p:nvPr/>
-        </p:nvSpPr>
-        <p:spPr>
-          <a:xfrm>
-            <a:off x="9560964" y="2423160"/>
-            <a:ext cx="2051913" cy="1828800"/>
-          </a:xfrm>
-          <a:prstGeom prst="rect">
-            <a:avLst/>
-          </a:prstGeom>
-          <a:solidFill>
-            <a:srgbClr val="1E1E1C"/>
-          </a:solidFill>
-          <a:ln w="9525">
-            <a:solidFill>
-              <a:srgbClr val="2A2A26"/>
-            </a:solidFill>
-          </a:ln>
-          <a:effectLst/>
-        </p:spPr>
-        <p:style>
-          <a:lnRef idx="1">
-            <a:schemeClr val="accent1"/>
-          </a:lnRef>
-          <a:fillRef idx="3">
-            <a:schemeClr val="accent1"/>
-          </a:fillRef>
-          <a:effectRef idx="2">
-            <a:schemeClr val="accent1"/>
-          </a:effectRef>
-          <a:fontRef idx="minor">
-            <a:schemeClr val="lt1"/>
-          </a:fontRef>
-        </p:style>
-        <p:txBody>
-          <a:bodyPr rtlCol="0" anchor="ctr"/>
-          <a:lstStyle/>
-          <a:p>
-            <a:pPr algn="ctr"/>
-          </a:p>
-        </p:txBody>
-      </p:sp>
-      <p:sp>
-        <p:nvSpPr>
-          <p:cNvPr id="15" name="TextBox 14"/>
-          <p:cNvSpPr txBox="1"/>
-          <p:nvPr/>
-        </p:nvSpPr>
-        <p:spPr>
-          <a:xfrm>
-            <a:off x="9560964" y="2926080"/>
-            <a:ext cx="2051913" cy="1097280"/>
-          </a:xfrm>
-          <a:prstGeom prst="rect">
-            <a:avLst/>
-          </a:prstGeom>
-          <a:noFill/>
-        </p:spPr>
-        <p:txBody>
-          <a:bodyPr wrap="square" anchor="ctr" lIns="0" rIns="0" tIns="0" bIns="0">
-            <a:spAutoFit/>
-          </a:bodyPr>
-          <a:lstStyle/>
-          <a:p>
-            <a:pPr algn="ctr">
-              <a:spcBef>
-                <a:spcPts val="0"/>
-              </a:spcBef>
-              <a:spcAft>
-                <a:spcPts val="600"/>
-              </a:spcAft>
-            </a:pPr>
-            <a:r>
-              <a:rPr sz="1700" b="1" i="0">
-                <a:solidFill>
-                  <a:srgbClr val="A04030"/>
-                </a:solidFill>
-                <a:latin typeface="Microsoft YaHei"/>
-                <a:ea typeface="Microsoft YaHei"/>
-              </a:rPr>
-              <a:t>寂灭期</a:t>
-            </a:r>
-          </a:p>
-          <a:p>
-            <a:pPr algn="ctr">
-              <a:spcBef>
-                <a:spcPts val="600"/>
-              </a:spcBef>
-              <a:spcAft>
-                <a:spcPts val="600"/>
-              </a:spcAft>
-            </a:pPr>
-            <a:r>
-              <a:rPr sz="1100" b="0" i="0">
-                <a:solidFill>
-                  <a:srgbClr val="7A7A70"/>
-                </a:solidFill>
-                <a:latin typeface="Consolas"/>
-                <a:ea typeface="Consolas"/>
-              </a:rPr>
-              <a:t>.90 – 1.0</a:t>
-            </a:r>
-          </a:p>
-        </p:txBody>
-      </p:sp>
-      <p:sp>
-        <p:nvSpPr>
-          <p:cNvPr id="16" name="TextBox 15"/>
-          <p:cNvSpPr txBox="1"/>
-          <p:nvPr/>
-        </p:nvSpPr>
-        <p:spPr>
-          <a:xfrm>
-            <a:off x="548640" y="4663440"/>
-            <a:ext cx="11064240" cy="1463040"/>
+            <a:off x="548640" y="5532120"/>
+            <a:ext cx="11064240" cy="914400"/>
           </a:xfrm>
           <a:prstGeom prst="rect">
             <a:avLst/>
@@ -7477,61 +7565,41 @@
               </a:spcAft>
             </a:pPr>
             <a:r>
-              <a:rPr sz="1400" b="1" i="0">
-                <a:solidFill>
-                  <a:srgbClr val="C8C8C0"/>
+              <a:rPr sz="1300" b="0" i="0">
+                <a:solidFill>
+                  <a:srgbClr val="8A8372"/>
                 </a:solidFill>
                 <a:latin typeface="Microsoft YaHei"/>
                 <a:ea typeface="Microsoft YaHei"/>
               </a:rPr>
-              <a:t>三种视觉风格 · Three locked visual styles:</a:t>
-            </a:r>
-          </a:p>
-          <a:p>
-            <a:pPr algn="l">
-              <a:spcBef>
-                <a:spcPts val="800"/>
-              </a:spcBef>
-              <a:spcAft>
-                <a:spcPts val="600"/>
-              </a:spcAft>
-            </a:pPr>
-            <a:r>
-              <a:rPr sz="1300" b="0" i="0">
-                <a:solidFill>
-                  <a:srgbClr val="7A7A70"/>
+              <a:t>一张日落照：渐进像素化 + 去饱和褪色 + 通道噪声 + 透明度淡出，最终只剩灰白雪花，然后是凭证。</a:t>
+            </a:r>
+          </a:p>
+          <a:p>
+            <a:pPr algn="l">
+              <a:spcBef>
+                <a:spcPts val="600"/>
+              </a:spcBef>
+              <a:spcAft>
+                <a:spcPts val="600"/>
+              </a:spcAft>
+            </a:pPr>
+            <a:r>
+              <a:rPr sz="1100" b="0" i="0">
+                <a:solidFill>
+                  <a:srgbClr val="5C564A"/>
                 </a:solidFill>
                 <a:latin typeface="Consolas"/>
                 <a:ea typeface="Consolas"/>
               </a:rPr>
-              <a:t>CSS/SVG 模糊 · 噪声叠加      |      Canvas 像素噪声注入      |      ASCII 字符崩坏 ░▒▓╳╬█</a:t>
-            </a:r>
-          </a:p>
-          <a:p>
-            <a:pPr algn="l">
-              <a:spcBef>
-                <a:spcPts val="1000"/>
-              </a:spcBef>
-              <a:spcAft>
-                <a:spcPts val="600"/>
-              </a:spcAft>
-            </a:pPr>
-            <a:r>
-              <a:rPr sz="1200" b="0" i="0">
-                <a:solidFill>
-                  <a:srgbClr val="5A5A4A"/>
-                </a:solidFill>
-                <a:latin typeface="Microsoft YaHei"/>
-                <a:ea typeface="Microsoft YaHei"/>
-              </a:rPr>
-              <a:t>衰变基于真实时间，由后端调度器驱动；演示模式 ×720 加速。随机性改变路径，但不改变最终结果。</a:t>
-            </a:r>
-          </a:p>
-        </p:txBody>
-      </p:sp>
-      <p:sp>
-        <p:nvSpPr>
-          <p:cNvPr id="17" name="TextBox 16"/>
+              <a:t>Real product capture · 不是简单模糊，而是像一张照片真的在腐烂。</a:t>
+            </a:r>
+          </a:p>
+        </p:txBody>
+      </p:sp>
+      <p:sp>
+        <p:nvSpPr>
+          <p:cNvPr id="8" name="TextBox 7"/>
           <p:cNvSpPr txBox="1"/>
           <p:nvPr/>
         </p:nvSpPr>
@@ -7562,7 +7630,7 @@
             <a:r>
               <a:rPr sz="900" b="0" i="0">
                 <a:solidFill>
-                  <a:srgbClr val="5A5A4A"/>
+                  <a:srgbClr val="5C564A"/>
                 </a:solidFill>
                 <a:latin typeface="Consolas"/>
                 <a:ea typeface="Consolas"/>
@@ -7574,7 +7642,7 @@
       </p:sp>
       <p:sp>
         <p:nvSpPr>
-          <p:cNvPr id="18" name="TextBox 17"/>
+          <p:cNvPr id="9" name="TextBox 8"/>
           <p:cNvSpPr txBox="1"/>
           <p:nvPr/>
         </p:nvSpPr>
@@ -7605,7 +7673,7 @@
             <a:r>
               <a:rPr sz="900" b="0" i="0">
                 <a:solidFill>
-                  <a:srgbClr val="5A5A4A"/>
+                  <a:srgbClr val="5C564A"/>
                 </a:solidFill>
                 <a:latin typeface="Consolas"/>
                 <a:ea typeface="Consolas"/>
@@ -7648,7 +7716,7 @@
             <a:avLst/>
           </a:prstGeom>
           <a:solidFill>
-            <a:srgbClr val="121212"/>
+            <a:srgbClr val="100F0D"/>
           </a:solidFill>
           <a:ln>
             <a:noFill/>
@@ -7692,7 +7760,7 @@
             <a:avLst/>
           </a:prstGeom>
           <a:solidFill>
-            <a:srgbClr val="8A7A5A"/>
+            <a:srgbClr val="B89A63"/>
           </a:solidFill>
           <a:ln>
             <a:noFill/>
@@ -7754,12 +7822,12 @@
             <a:r>
               <a:rPr sz="1200" b="0" i="0">
                 <a:solidFill>
-                  <a:srgbClr val="8A7A5A"/>
+                  <a:srgbClr val="B89A63"/>
                 </a:solidFill>
                 <a:latin typeface="Consolas"/>
                 <a:ea typeface="Consolas"/>
               </a:rPr>
-              <a:t>06  SYSTEM · 墓园体系</a:t>
+              <a:t>06  PRODUCT · 真实产品界面</a:t>
             </a:r>
           </a:p>
         </p:txBody>
@@ -7797,12 +7865,12 @@
             <a:r>
               <a:rPr sz="3000" b="1" i="0">
                 <a:solidFill>
-                  <a:srgbClr val="C8C8C0"/>
+                  <a:srgbClr val="D2CDBE"/>
                 </a:solidFill>
                 <a:latin typeface="Microsoft YaHei"/>
                 <a:ea typeface="Microsoft YaHei"/>
               </a:rPr>
-              <a:t>从个人守墓到陌生人的凭吊</a:t>
+              <a:t>墓园、无名墓区、落地页 —— 已上线</a:t>
             </a:r>
           </a:p>
           <a:p>
@@ -7817,12 +7885,12 @@
             <a:r>
               <a:rPr sz="1400" b="0" i="0">
                 <a:solidFill>
-                  <a:srgbClr val="7A7A70"/>
+                  <a:srgbClr val="8A8372"/>
                 </a:solidFill>
                 <a:latin typeface="Consolas"/>
                 <a:ea typeface="Consolas"/>
               </a:rPr>
-              <a:t>From a private keeper to the kindness of strangers</a:t>
+              <a:t>Graveyard, Nameless Grounds, Landing — live now</a:t>
             </a:r>
           </a:p>
         </p:txBody>
@@ -7835,18 +7903,16 @@
         </p:nvSpPr>
         <p:spPr>
           <a:xfrm>
-            <a:off x="548640" y="2468880"/>
-            <a:ext cx="3566160" cy="2926080"/>
-          </a:xfrm>
-          <a:prstGeom prst="rect">
-            <a:avLst/>
-          </a:prstGeom>
-          <a:solidFill>
-            <a:srgbClr val="1E1E1C"/>
-          </a:solidFill>
-          <a:ln w="9525">
+            <a:off x="548640" y="2527069"/>
+            <a:ext cx="3611880" cy="2626821"/>
+          </a:xfrm>
+          <a:prstGeom prst="rect">
+            <a:avLst/>
+          </a:prstGeom>
+          <a:noFill/>
+          <a:ln w="12700">
             <a:solidFill>
-              <a:srgbClr val="2A2A26"/>
+              <a:srgbClr val="3A3426"/>
             </a:solidFill>
           </a:ln>
           <a:effectLst/>
@@ -7873,16 +7939,40 @@
           </a:p>
         </p:txBody>
       </p:sp>
-      <p:sp>
-        <p:nvSpPr>
-          <p:cNvPr id="7" name="TextBox 6"/>
+      <p:pic>
+        <p:nvPicPr>
+          <p:cNvPr id="7" name="Picture 6" descr="graveyard-images.png"/>
+          <p:cNvPicPr>
+            <a:picLocks noChangeAspect="1"/>
+          </p:cNvPicPr>
+          <p:nvPr/>
+        </p:nvPicPr>
+        <p:blipFill>
+          <a:blip r:embed="rId2"/>
+          <a:stretch>
+            <a:fillRect/>
+          </a:stretch>
+        </p:blipFill>
+        <p:spPr>
+          <a:xfrm>
+            <a:off x="548640" y="2527069"/>
+            <a:ext cx="3611880" cy="2626821"/>
+          </a:xfrm>
+          <a:prstGeom prst="rect">
+            <a:avLst/>
+          </a:prstGeom>
+        </p:spPr>
+      </p:pic>
+      <p:sp>
+        <p:nvSpPr>
+          <p:cNvPr id="8" name="TextBox 7"/>
           <p:cNvSpPr txBox="1"/>
           <p:nvPr/>
         </p:nvSpPr>
         <p:spPr>
           <a:xfrm>
-            <a:off x="822960" y="2743200"/>
-            <a:ext cx="3017520" cy="2468880"/>
+            <a:off x="548640" y="5532120"/>
+            <a:ext cx="3611880" cy="457200"/>
           </a:xfrm>
           <a:prstGeom prst="rect">
             <a:avLst/>
@@ -7895,7 +7985,7 @@
           </a:bodyPr>
           <a:lstStyle/>
           <a:p>
-            <a:pPr algn="l">
+            <a:pPr algn="ctr">
               <a:spcBef>
                 <a:spcPts val="0"/>
               </a:spcBef>
@@ -7904,78 +7994,36 @@
               </a:spcAft>
             </a:pPr>
             <a:r>
-              <a:rPr sz="1800" b="1" i="0">
-                <a:solidFill>
-                  <a:srgbClr val="C8C8C0"/>
-                </a:solidFill>
-                <a:latin typeface="Microsoft YaHei"/>
-                <a:ea typeface="Microsoft YaHei"/>
-              </a:rPr>
-              <a:t>个人墓园</a:t>
-            </a:r>
-          </a:p>
-          <a:p>
-            <a:pPr algn="l">
-              <a:spcBef>
-                <a:spcPts val="200"/>
-              </a:spcBef>
-              <a:spcAft>
-                <a:spcPts val="600"/>
-              </a:spcAft>
-            </a:pPr>
-            <a:r>
-              <a:rPr sz="1100" b="0" i="0">
-                <a:solidFill>
-                  <a:srgbClr val="8A7A5A"/>
+              <a:rPr sz="1200" b="0" i="0">
+                <a:solidFill>
+                  <a:srgbClr val="8A8372"/>
                 </a:solidFill>
                 <a:latin typeface="Consolas"/>
                 <a:ea typeface="Consolas"/>
               </a:rPr>
-              <a:t>My Graveyard</a:t>
-            </a:r>
-          </a:p>
-          <a:p>
-            <a:pPr algn="l">
-              <a:spcBef>
-                <a:spcPts val="1400"/>
-              </a:spcBef>
-              <a:spcAft>
-                <a:spcPts val="600"/>
-              </a:spcAft>
-            </a:pPr>
-            <a:r>
-              <a:rPr sz="1200" b="0" i="0">
-                <a:solidFill>
-                  <a:srgbClr val="7A7A70"/>
-                </a:solidFill>
-                <a:latin typeface="Microsoft YaHei"/>
-                <a:ea typeface="Microsoft YaHei"/>
-              </a:rPr>
-              <a:t>查看、筛选、擦拭自己的碑。每天上线，像一个守墓人。</a:t>
-            </a:r>
-          </a:p>
-        </p:txBody>
-      </p:sp>
-      <p:sp>
-        <p:nvSpPr>
-          <p:cNvPr id="8" name="Rectangle 7"/>
+              <a:t>我的墓园 · 图片碑</a:t>
+            </a:r>
+          </a:p>
+        </p:txBody>
+      </p:sp>
+      <p:sp>
+        <p:nvSpPr>
+          <p:cNvPr id="9" name="Rectangle 8"/>
           <p:cNvSpPr/>
           <p:nvPr/>
         </p:nvSpPr>
         <p:spPr>
           <a:xfrm>
-            <a:off x="4297680" y="2468880"/>
-            <a:ext cx="3566160" cy="2926080"/>
-          </a:xfrm>
-          <a:prstGeom prst="rect">
-            <a:avLst/>
-          </a:prstGeom>
-          <a:solidFill>
-            <a:srgbClr val="1E1E1C"/>
-          </a:solidFill>
-          <a:ln w="9525">
+            <a:off x="4334256" y="2527069"/>
+            <a:ext cx="3611880" cy="2626821"/>
+          </a:xfrm>
+          <a:prstGeom prst="rect">
+            <a:avLst/>
+          </a:prstGeom>
+          <a:noFill/>
+          <a:ln w="12700">
             <a:solidFill>
-              <a:srgbClr val="2A2A26"/>
+              <a:srgbClr val="3A3426"/>
             </a:solidFill>
           </a:ln>
           <a:effectLst/>
@@ -8002,16 +8050,40 @@
           </a:p>
         </p:txBody>
       </p:sp>
-      <p:sp>
-        <p:nvSpPr>
-          <p:cNvPr id="9" name="TextBox 8"/>
+      <p:pic>
+        <p:nvPicPr>
+          <p:cNvPr id="10" name="Picture 9" descr="public.png"/>
+          <p:cNvPicPr>
+            <a:picLocks noChangeAspect="1"/>
+          </p:cNvPicPr>
+          <p:nvPr/>
+        </p:nvPicPr>
+        <p:blipFill>
+          <a:blip r:embed="rId3"/>
+          <a:stretch>
+            <a:fillRect/>
+          </a:stretch>
+        </p:blipFill>
+        <p:spPr>
+          <a:xfrm>
+            <a:off x="4334256" y="2527069"/>
+            <a:ext cx="3611880" cy="2626821"/>
+          </a:xfrm>
+          <a:prstGeom prst="rect">
+            <a:avLst/>
+          </a:prstGeom>
+        </p:spPr>
+      </p:pic>
+      <p:sp>
+        <p:nvSpPr>
+          <p:cNvPr id="11" name="TextBox 10"/>
           <p:cNvSpPr txBox="1"/>
           <p:nvPr/>
         </p:nvSpPr>
         <p:spPr>
           <a:xfrm>
-            <a:off x="4572000" y="2743200"/>
-            <a:ext cx="3017520" cy="2468880"/>
+            <a:off x="4334256" y="5532120"/>
+            <a:ext cx="3611880" cy="457200"/>
           </a:xfrm>
           <a:prstGeom prst="rect">
             <a:avLst/>
@@ -8024,7 +8096,7 @@
           </a:bodyPr>
           <a:lstStyle/>
           <a:p>
-            <a:pPr algn="l">
+            <a:pPr algn="ctr">
               <a:spcBef>
                 <a:spcPts val="0"/>
               </a:spcBef>
@@ -8033,78 +8105,36 @@
               </a:spcAft>
             </a:pPr>
             <a:r>
-              <a:rPr sz="1800" b="1" i="0">
-                <a:solidFill>
-                  <a:srgbClr val="C8C8C0"/>
-                </a:solidFill>
-                <a:latin typeface="Microsoft YaHei"/>
-                <a:ea typeface="Microsoft YaHei"/>
-              </a:rPr>
-              <a:t>无名墓区</a:t>
-            </a:r>
-          </a:p>
-          <a:p>
-            <a:pPr algn="l">
-              <a:spcBef>
-                <a:spcPts val="200"/>
-              </a:spcBef>
-              <a:spcAft>
-                <a:spcPts val="600"/>
-              </a:spcAft>
-            </a:pPr>
-            <a:r>
-              <a:rPr sz="1100" b="0" i="0">
-                <a:solidFill>
-                  <a:srgbClr val="8A7A5A"/>
+              <a:rPr sz="1200" b="0" i="0">
+                <a:solidFill>
+                  <a:srgbClr val="8A8372"/>
                 </a:solidFill>
                 <a:latin typeface="Consolas"/>
                 <a:ea typeface="Consolas"/>
               </a:rPr>
-              <a:t>Nameless Grounds</a:t>
-            </a:r>
-          </a:p>
-          <a:p>
-            <a:pPr algn="l">
-              <a:spcBef>
-                <a:spcPts val="1400"/>
-              </a:spcBef>
-              <a:spcAft>
-                <a:spcPts val="600"/>
-              </a:spcAft>
-            </a:pPr>
-            <a:r>
-              <a:rPr sz="1200" b="0" i="0">
-                <a:solidFill>
-                  <a:srgbClr val="7A7A70"/>
-                </a:solidFill>
-                <a:latin typeface="Microsoft YaHei"/>
-                <a:ea typeface="Microsoft YaHei"/>
-              </a:rPr>
-              <a:t>匿名公开碑。陌生人可凭吊一次，不得到任何反馈——不求回报的微小善意。</a:t>
-            </a:r>
-          </a:p>
-        </p:txBody>
-      </p:sp>
-      <p:sp>
-        <p:nvSpPr>
-          <p:cNvPr id="10" name="Rectangle 9"/>
+              <a:t>无名墓区 · 凭吊</a:t>
+            </a:r>
+          </a:p>
+        </p:txBody>
+      </p:sp>
+      <p:sp>
+        <p:nvSpPr>
+          <p:cNvPr id="12" name="Rectangle 11"/>
           <p:cNvSpPr/>
           <p:nvPr/>
         </p:nvSpPr>
         <p:spPr>
           <a:xfrm>
-            <a:off x="8046720" y="2468880"/>
-            <a:ext cx="3566160" cy="2926080"/>
-          </a:xfrm>
-          <a:prstGeom prst="rect">
-            <a:avLst/>
-          </a:prstGeom>
-          <a:solidFill>
-            <a:srgbClr val="1E1E1C"/>
-          </a:solidFill>
-          <a:ln w="9525">
+            <a:off x="8119872" y="2718608"/>
+            <a:ext cx="3611880" cy="2243743"/>
+          </a:xfrm>
+          <a:prstGeom prst="rect">
+            <a:avLst/>
+          </a:prstGeom>
+          <a:noFill/>
+          <a:ln w="12700">
             <a:solidFill>
-              <a:srgbClr val="2A2A26"/>
+              <a:srgbClr val="3A3426"/>
             </a:solidFill>
           </a:ln>
           <a:effectLst/>
@@ -8131,16 +8161,40 @@
           </a:p>
         </p:txBody>
       </p:sp>
-      <p:sp>
-        <p:nvSpPr>
-          <p:cNvPr id="11" name="TextBox 10"/>
+      <p:pic>
+        <p:nvPicPr>
+          <p:cNvPr id="13" name="Picture 12" descr="landing.png"/>
+          <p:cNvPicPr>
+            <a:picLocks noChangeAspect="1"/>
+          </p:cNvPicPr>
+          <p:nvPr/>
+        </p:nvPicPr>
+        <p:blipFill>
+          <a:blip r:embed="rId4"/>
+          <a:stretch>
+            <a:fillRect/>
+          </a:stretch>
+        </p:blipFill>
+        <p:spPr>
+          <a:xfrm>
+            <a:off x="8119872" y="2718608"/>
+            <a:ext cx="3611880" cy="2243743"/>
+          </a:xfrm>
+          <a:prstGeom prst="rect">
+            <a:avLst/>
+          </a:prstGeom>
+        </p:spPr>
+      </p:pic>
+      <p:sp>
+        <p:nvSpPr>
+          <p:cNvPr id="14" name="TextBox 13"/>
           <p:cNvSpPr txBox="1"/>
           <p:nvPr/>
         </p:nvSpPr>
         <p:spPr>
           <a:xfrm>
-            <a:off x="8321040" y="2743200"/>
-            <a:ext cx="3017520" cy="2468880"/>
+            <a:off x="8119872" y="5532120"/>
+            <a:ext cx="3611880" cy="457200"/>
           </a:xfrm>
           <a:prstGeom prst="rect">
             <a:avLst/>
@@ -8153,7 +8207,7 @@
           </a:bodyPr>
           <a:lstStyle/>
           <a:p>
-            <a:pPr algn="l">
+            <a:pPr algn="ctr">
               <a:spcBef>
                 <a:spcPts val="0"/>
               </a:spcBef>
@@ -8162,61 +8216,21 @@
               </a:spcAft>
             </a:pPr>
             <a:r>
-              <a:rPr sz="1800" b="1" i="0">
-                <a:solidFill>
-                  <a:srgbClr val="C8C8C0"/>
-                </a:solidFill>
-                <a:latin typeface="Microsoft YaHei"/>
-                <a:ea typeface="Microsoft YaHei"/>
-              </a:rPr>
-              <a:t>消逝档案</a:t>
-            </a:r>
-          </a:p>
-          <a:p>
-            <a:pPr algn="l">
-              <a:spcBef>
-                <a:spcPts val="200"/>
-              </a:spcBef>
-              <a:spcAft>
-                <a:spcPts val="600"/>
-              </a:spcAft>
-            </a:pPr>
-            <a:r>
-              <a:rPr sz="1100" b="0" i="0">
-                <a:solidFill>
-                  <a:srgbClr val="8A7A5A"/>
+              <a:rPr sz="1200" b="0" i="0">
+                <a:solidFill>
+                  <a:srgbClr val="8A8372"/>
                 </a:solidFill>
                 <a:latin typeface="Consolas"/>
                 <a:ea typeface="Consolas"/>
               </a:rPr>
-              <a:t>Extinction Archive</a:t>
-            </a:r>
-          </a:p>
-          <a:p>
-            <a:pPr algn="l">
-              <a:spcBef>
-                <a:spcPts val="1400"/>
-              </a:spcBef>
-              <a:spcAft>
-                <a:spcPts val="600"/>
-              </a:spcAft>
-            </a:pPr>
-            <a:r>
-              <a:rPr sz="1200" b="0" i="0">
-                <a:solidFill>
-                  <a:srgbClr val="7A7A70"/>
-                </a:solidFill>
-                <a:latin typeface="Microsoft YaHei"/>
-                <a:ea typeface="Microsoft YaHei"/>
-              </a:rPr>
-              <a:t>只留凭证编号和时间。档案本身也逐渐丢页，最终连「消失过」也被忘记。</a:t>
-            </a:r>
-          </a:p>
-        </p:txBody>
-      </p:sp>
-      <p:sp>
-        <p:nvSpPr>
-          <p:cNvPr id="12" name="TextBox 11"/>
+              <a:t>落地页 · 反永久保存</a:t>
+            </a:r>
+          </a:p>
+        </p:txBody>
+      </p:sp>
+      <p:sp>
+        <p:nvSpPr>
+          <p:cNvPr id="15" name="TextBox 14"/>
           <p:cNvSpPr txBox="1"/>
           <p:nvPr/>
         </p:nvSpPr>
@@ -8247,7 +8261,7 @@
             <a:r>
               <a:rPr sz="900" b="0" i="0">
                 <a:solidFill>
-                  <a:srgbClr val="5A5A4A"/>
+                  <a:srgbClr val="5C564A"/>
                 </a:solidFill>
                 <a:latin typeface="Consolas"/>
                 <a:ea typeface="Consolas"/>
@@ -8259,7 +8273,7 @@
       </p:sp>
       <p:sp>
         <p:nvSpPr>
-          <p:cNvPr id="13" name="TextBox 12"/>
+          <p:cNvPr id="16" name="TextBox 15"/>
           <p:cNvSpPr txBox="1"/>
           <p:nvPr/>
         </p:nvSpPr>
@@ -8290,7 +8304,7 @@
             <a:r>
               <a:rPr sz="900" b="0" i="0">
                 <a:solidFill>
-                  <a:srgbClr val="5A5A4A"/>
+                  <a:srgbClr val="5C564A"/>
                 </a:solidFill>
                 <a:latin typeface="Consolas"/>
                 <a:ea typeface="Consolas"/>
@@ -8333,7 +8347,7 @@
             <a:avLst/>
           </a:prstGeom>
           <a:solidFill>
-            <a:srgbClr val="121212"/>
+            <a:srgbClr val="100F0D"/>
           </a:solidFill>
           <a:ln>
             <a:noFill/>
@@ -8377,7 +8391,7 @@
             <a:avLst/>
           </a:prstGeom>
           <a:solidFill>
-            <a:srgbClr val="8A7A5A"/>
+            <a:srgbClr val="B89A63"/>
           </a:solidFill>
           <a:ln>
             <a:noFill/>
@@ -8439,12 +8453,12 @@
             <a:r>
               <a:rPr sz="1200" b="0" i="0">
                 <a:solidFill>
-                  <a:srgbClr val="8A7A5A"/>
+                  <a:srgbClr val="B89A63"/>
                 </a:solidFill>
                 <a:latin typeface="Consolas"/>
                 <a:ea typeface="Consolas"/>
               </a:rPr>
-              <a:t>07  ENGINEERING · 技术架构</a:t>
+              <a:t>07  SYSTEM · 墓园体系</a:t>
             </a:r>
           </a:p>
         </p:txBody>
@@ -8482,12 +8496,12 @@
             <a:r>
               <a:rPr sz="3000" b="1" i="0">
                 <a:solidFill>
-                  <a:srgbClr val="C8C8C0"/>
+                  <a:srgbClr val="D2CDBE"/>
                 </a:solidFill>
                 <a:latin typeface="Microsoft YaHei"/>
                 <a:ea typeface="Microsoft YaHei"/>
               </a:rPr>
-              <a:t>一套契约，两种运行模式</a:t>
+              <a:t>从个人守墓到陌生人的凭吊</a:t>
             </a:r>
           </a:p>
           <a:p>
@@ -8502,12 +8516,12 @@
             <a:r>
               <a:rPr sz="1400" b="0" i="0">
                 <a:solidFill>
-                  <a:srgbClr val="7A7A70"/>
+                  <a:srgbClr val="8A8372"/>
                 </a:solidFill>
                 <a:latin typeface="Consolas"/>
                 <a:ea typeface="Consolas"/>
               </a:rPr>
-              <a:t>One contract, two runtimes</a:t>
+              <a:t>From a private keeper to the kindness of strangers</a:t>
             </a:r>
           </a:p>
         </p:txBody>
@@ -8520,18 +8534,18 @@
         </p:nvSpPr>
         <p:spPr>
           <a:xfrm>
-            <a:off x="548640" y="2331720"/>
-            <a:ext cx="5394960" cy="3566160"/>
+            <a:off x="548640" y="2468880"/>
+            <a:ext cx="3566160" cy="2926080"/>
           </a:xfrm>
           <a:prstGeom prst="rect">
             <a:avLst/>
           </a:prstGeom>
           <a:solidFill>
-            <a:srgbClr val="1E1E1C"/>
+            <a:srgbClr val="1C1A16"/>
           </a:solidFill>
           <a:ln w="9525">
             <a:solidFill>
-              <a:srgbClr val="2A2A26"/>
+              <a:srgbClr val="3A3426"/>
             </a:solidFill>
           </a:ln>
           <a:effectLst/>
@@ -8566,8 +8580,8 @@
         </p:nvSpPr>
         <p:spPr>
           <a:xfrm>
-            <a:off x="868680" y="2560320"/>
-            <a:ext cx="4846320" cy="3200400"/>
+            <a:off x="822960" y="2743200"/>
+            <a:ext cx="3017520" cy="2468880"/>
           </a:xfrm>
           <a:prstGeom prst="rect">
             <a:avLst/>
@@ -8589,40 +8603,40 @@
               </a:spcAft>
             </a:pPr>
             <a:r>
-              <a:rPr sz="1600" b="1" i="0">
-                <a:solidFill>
-                  <a:srgbClr val="C8C8C0"/>
+              <a:rPr sz="1800" b="1" i="0">
+                <a:solidFill>
+                  <a:srgbClr val="D2CDBE"/>
                 </a:solidFill>
                 <a:latin typeface="Microsoft YaHei"/>
                 <a:ea typeface="Microsoft YaHei"/>
               </a:rPr>
-              <a:t>本地完整模式 · Local full stack</a:t>
-            </a:r>
-          </a:p>
-          <a:p>
-            <a:pPr algn="l">
-              <a:spcBef>
-                <a:spcPts val="700"/>
-              </a:spcBef>
-              <a:spcAft>
-                <a:spcPts val="600"/>
-              </a:spcAft>
-            </a:pPr>
-            <a:r>
-              <a:rPr sz="1200" b="0" i="0">
-                <a:solidFill>
-                  <a:srgbClr val="7A7A70"/>
+              <a:t>个人墓园</a:t>
+            </a:r>
+          </a:p>
+          <a:p>
+            <a:pPr algn="l">
+              <a:spcBef>
+                <a:spcPts val="200"/>
+              </a:spcBef>
+              <a:spcAft>
+                <a:spcPts val="600"/>
+              </a:spcAft>
+            </a:pPr>
+            <a:r>
+              <a:rPr sz="1100" b="0" i="0">
+                <a:solidFill>
+                  <a:srgbClr val="B89A63"/>
                 </a:solidFill>
                 <a:latin typeface="Consolas"/>
                 <a:ea typeface="Consolas"/>
               </a:rPr>
-              <a:t>·  FastAPI · SQLAlchemy async · SQLite</a:t>
-            </a:r>
-          </a:p>
-          <a:p>
-            <a:pPr algn="l">
-              <a:spcBef>
-                <a:spcPts val="700"/>
+              <a:t>My Graveyard</a:t>
+            </a:r>
+          </a:p>
+          <a:p>
+            <a:pPr algn="l">
+              <a:spcBef>
+                <a:spcPts val="1400"/>
               </a:spcBef>
               <a:spcAft>
                 <a:spcPts val="600"/>
@@ -8631,72 +8645,12 @@
             <a:r>
               <a:rPr sz="1200" b="0" i="0">
                 <a:solidFill>
-                  <a:srgbClr val="7A7A70"/>
-                </a:solidFill>
-                <a:latin typeface="Consolas"/>
-                <a:ea typeface="Consolas"/>
-              </a:rPr>
-              <a:t>·  APScheduler 真实时间熵增引擎</a:t>
-            </a:r>
-          </a:p>
-          <a:p>
-            <a:pPr algn="l">
-              <a:spcBef>
-                <a:spcPts val="700"/>
-              </a:spcBef>
-              <a:spcAft>
-                <a:spcPts val="600"/>
-              </a:spcAft>
-            </a:pPr>
-            <a:r>
-              <a:rPr sz="1200" b="0" i="0">
-                <a:solidFill>
-                  <a:srgbClr val="7A7A70"/>
-                </a:solidFill>
-                <a:latin typeface="Consolas"/>
-                <a:ea typeface="Consolas"/>
-              </a:rPr>
-              <a:t>·  OpenAI 五环节生成 + 离线 fallback</a:t>
-            </a:r>
-          </a:p>
-          <a:p>
-            <a:pPr algn="l">
-              <a:spcBef>
-                <a:spcPts val="700"/>
-              </a:spcBef>
-              <a:spcAft>
-                <a:spcPts val="600"/>
-              </a:spcAft>
-            </a:pPr>
-            <a:r>
-              <a:rPr sz="1200" b="0" i="0">
-                <a:solidFill>
-                  <a:srgbClr val="7A7A70"/>
-                </a:solidFill>
-                <a:latin typeface="Consolas"/>
-                <a:ea typeface="Consolas"/>
-              </a:rPr>
-              <a:t>·  Wayback Machine 快照查询</a:t>
-            </a:r>
-          </a:p>
-          <a:p>
-            <a:pPr algn="l">
-              <a:spcBef>
-                <a:spcPts val="700"/>
-              </a:spcBef>
-              <a:spcAft>
-                <a:spcPts val="600"/>
-              </a:spcAft>
-            </a:pPr>
-            <a:r>
-              <a:rPr sz="1200" b="0" i="0">
-                <a:solidFill>
-                  <a:srgbClr val="7A7A70"/>
-                </a:solidFill>
-                <a:latin typeface="Consolas"/>
-                <a:ea typeface="Consolas"/>
-              </a:rPr>
-              <a:t>·  SHA-256 唯一消逝凭证</a:t>
+                  <a:srgbClr val="8A8372"/>
+                </a:solidFill>
+                <a:latin typeface="Microsoft YaHei"/>
+                <a:ea typeface="Microsoft YaHei"/>
+              </a:rPr>
+              <a:t>查看、筛选、擦拭自己的碑。每天上线，像一个守墓人。</a:t>
             </a:r>
           </a:p>
         </p:txBody>
@@ -8709,18 +8663,18 @@
         </p:nvSpPr>
         <p:spPr>
           <a:xfrm>
-            <a:off x="6217920" y="2331720"/>
-            <a:ext cx="5394960" cy="3566160"/>
+            <a:off x="4297680" y="2468880"/>
+            <a:ext cx="3566160" cy="2926080"/>
           </a:xfrm>
           <a:prstGeom prst="rect">
             <a:avLst/>
           </a:prstGeom>
           <a:solidFill>
-            <a:srgbClr val="1E1E1C"/>
+            <a:srgbClr val="1C1A16"/>
           </a:solidFill>
           <a:ln w="9525">
             <a:solidFill>
-              <a:srgbClr val="8A7A5A"/>
+              <a:srgbClr val="3A3426"/>
             </a:solidFill>
           </a:ln>
           <a:effectLst/>
@@ -8755,8 +8709,8 @@
         </p:nvSpPr>
         <p:spPr>
           <a:xfrm>
-            <a:off x="6537960" y="2560320"/>
-            <a:ext cx="4846320" cy="3200400"/>
+            <a:off x="4572000" y="2743200"/>
+            <a:ext cx="3017520" cy="2468880"/>
           </a:xfrm>
           <a:prstGeom prst="rect">
             <a:avLst/>
@@ -8778,40 +8732,40 @@
               </a:spcAft>
             </a:pPr>
             <a:r>
-              <a:rPr sz="1600" b="1" i="0">
-                <a:solidFill>
-                  <a:srgbClr val="C8C8C0"/>
+              <a:rPr sz="1800" b="1" i="0">
+                <a:solidFill>
+                  <a:srgbClr val="D2CDBE"/>
                 </a:solidFill>
                 <a:latin typeface="Microsoft YaHei"/>
                 <a:ea typeface="Microsoft YaHei"/>
               </a:rPr>
-              <a:t>GitHub Pages 静态模式</a:t>
-            </a:r>
-          </a:p>
-          <a:p>
-            <a:pPr algn="l">
-              <a:spcBef>
-                <a:spcPts val="700"/>
-              </a:spcBef>
-              <a:spcAft>
-                <a:spcPts val="600"/>
-              </a:spcAft>
-            </a:pPr>
-            <a:r>
-              <a:rPr sz="1200" b="0" i="0">
-                <a:solidFill>
-                  <a:srgbClr val="7A7A70"/>
+              <a:t>无名墓区</a:t>
+            </a:r>
+          </a:p>
+          <a:p>
+            <a:pPr algn="l">
+              <a:spcBef>
+                <a:spcPts val="200"/>
+              </a:spcBef>
+              <a:spcAft>
+                <a:spcPts val="600"/>
+              </a:spcAft>
+            </a:pPr>
+            <a:r>
+              <a:rPr sz="1100" b="0" i="0">
+                <a:solidFill>
+                  <a:srgbClr val="B89A63"/>
                 </a:solidFill>
                 <a:latin typeface="Consolas"/>
                 <a:ea typeface="Consolas"/>
               </a:rPr>
-              <a:t>·  Vanilla JS + Vite 静态托管</a:t>
-            </a:r>
-          </a:p>
-          <a:p>
-            <a:pPr algn="l">
-              <a:spcBef>
-                <a:spcPts val="700"/>
+              <a:t>Nameless Grounds</a:t>
+            </a:r>
+          </a:p>
+          <a:p>
+            <a:pPr algn="l">
+              <a:spcBef>
+                <a:spcPts val="1400"/>
               </a:spcBef>
               <a:spcAft>
                 <a:spcPts val="600"/>
@@ -8820,86 +8774,72 @@
             <a:r>
               <a:rPr sz="1200" b="0" i="0">
                 <a:solidFill>
-                  <a:srgbClr val="7A7A70"/>
-                </a:solidFill>
-                <a:latin typeface="Consolas"/>
-                <a:ea typeface="Consolas"/>
-              </a:rPr>
-              <a:t>·  同一 API 契约的浏览器适配层</a:t>
-            </a:r>
-          </a:p>
-          <a:p>
-            <a:pPr algn="l">
-              <a:spcBef>
-                <a:spcPts val="700"/>
-              </a:spcBef>
-              <a:spcAft>
-                <a:spcPts val="600"/>
-              </a:spcAft>
-            </a:pPr>
-            <a:r>
-              <a:rPr sz="1200" b="0" i="0">
-                <a:solidFill>
-                  <a:srgbClr val="7A7A70"/>
-                </a:solidFill>
-                <a:latin typeface="Consolas"/>
-                <a:ea typeface="Consolas"/>
-              </a:rPr>
-              <a:t>·  localStorage 持久化访客操作</a:t>
-            </a:r>
-          </a:p>
-          <a:p>
-            <a:pPr algn="l">
-              <a:spcBef>
-                <a:spcPts val="700"/>
-              </a:spcBef>
-              <a:spcAft>
-                <a:spcPts val="600"/>
-              </a:spcAft>
-            </a:pPr>
-            <a:r>
-              <a:rPr sz="1200" b="0" i="0">
-                <a:solidFill>
-                  <a:srgbClr val="7A7A70"/>
-                </a:solidFill>
-                <a:latin typeface="Consolas"/>
-                <a:ea typeface="Consolas"/>
-              </a:rPr>
-              <a:t>·  120 条可复现演示数据 fixture</a:t>
-            </a:r>
-          </a:p>
-          <a:p>
-            <a:pPr algn="l">
-              <a:spcBef>
-                <a:spcPts val="700"/>
-              </a:spcBef>
-              <a:spcAft>
-                <a:spcPts val="600"/>
-              </a:spcAft>
-            </a:pPr>
-            <a:r>
-              <a:rPr sz="1200" b="0" i="0">
-                <a:solidFill>
-                  <a:srgbClr val="7A7A70"/>
-                </a:solidFill>
-                <a:latin typeface="Consolas"/>
-                <a:ea typeface="Consolas"/>
-              </a:rPr>
-              <a:t>·  CI + Pages 自动部署</a:t>
-            </a:r>
-          </a:p>
-        </p:txBody>
-      </p:sp>
-      <p:sp>
-        <p:nvSpPr>
-          <p:cNvPr id="10" name="TextBox 9"/>
+                  <a:srgbClr val="8A8372"/>
+                </a:solidFill>
+                <a:latin typeface="Microsoft YaHei"/>
+                <a:ea typeface="Microsoft YaHei"/>
+              </a:rPr>
+              <a:t>匿名公开碑。陌生人可凭吊一次，不得到任何反馈——不求回报的微小善意。</a:t>
+            </a:r>
+          </a:p>
+        </p:txBody>
+      </p:sp>
+      <p:sp>
+        <p:nvSpPr>
+          <p:cNvPr id="10" name="Rectangle 9"/>
+          <p:cNvSpPr/>
+          <p:nvPr/>
+        </p:nvSpPr>
+        <p:spPr>
+          <a:xfrm>
+            <a:off x="8046720" y="2468880"/>
+            <a:ext cx="3566160" cy="2926080"/>
+          </a:xfrm>
+          <a:prstGeom prst="rect">
+            <a:avLst/>
+          </a:prstGeom>
+          <a:solidFill>
+            <a:srgbClr val="1C1A16"/>
+          </a:solidFill>
+          <a:ln w="9525">
+            <a:solidFill>
+              <a:srgbClr val="3A3426"/>
+            </a:solidFill>
+          </a:ln>
+          <a:effectLst/>
+        </p:spPr>
+        <p:style>
+          <a:lnRef idx="1">
+            <a:schemeClr val="accent1"/>
+          </a:lnRef>
+          <a:fillRef idx="3">
+            <a:schemeClr val="accent1"/>
+          </a:fillRef>
+          <a:effectRef idx="2">
+            <a:schemeClr val="accent1"/>
+          </a:effectRef>
+          <a:fontRef idx="minor">
+            <a:schemeClr val="lt1"/>
+          </a:fontRef>
+        </p:style>
+        <p:txBody>
+          <a:bodyPr rtlCol="0" anchor="ctr"/>
+          <a:lstStyle/>
+          <a:p>
+            <a:pPr algn="ctr"/>
+          </a:p>
+        </p:txBody>
+      </p:sp>
+      <p:sp>
+        <p:nvSpPr>
+          <p:cNvPr id="11" name="TextBox 10"/>
           <p:cNvSpPr txBox="1"/>
           <p:nvPr/>
         </p:nvSpPr>
         <p:spPr>
           <a:xfrm>
-            <a:off x="548640" y="6400800"/>
-            <a:ext cx="7315200" cy="365760"/>
+            <a:off x="8321040" y="2743200"/>
+            <a:ext cx="3017520" cy="2468880"/>
           </a:xfrm>
           <a:prstGeom prst="rect">
             <a:avLst/>
@@ -8921,28 +8861,68 @@
               </a:spcAft>
             </a:pPr>
             <a:r>
-              <a:rPr sz="900" b="0" i="0">
-                <a:solidFill>
-                  <a:srgbClr val="5A5A4A"/>
+              <a:rPr sz="1800" b="1" i="0">
+                <a:solidFill>
+                  <a:srgbClr val="D2CDBE"/>
+                </a:solidFill>
+                <a:latin typeface="Microsoft YaHei"/>
+                <a:ea typeface="Microsoft YaHei"/>
+              </a:rPr>
+              <a:t>消逝档案</a:t>
+            </a:r>
+          </a:p>
+          <a:p>
+            <a:pPr algn="l">
+              <a:spcBef>
+                <a:spcPts val="200"/>
+              </a:spcBef>
+              <a:spcAft>
+                <a:spcPts val="600"/>
+              </a:spcAft>
+            </a:pPr>
+            <a:r>
+              <a:rPr sz="1100" b="0" i="0">
+                <a:solidFill>
+                  <a:srgbClr val="B89A63"/>
                 </a:solidFill>
                 <a:latin typeface="Consolas"/>
                 <a:ea typeface="Consolas"/>
               </a:rPr>
-              <a:t>熵逝碑林 · Entropy Epitaph</a:t>
-            </a:r>
-          </a:p>
-        </p:txBody>
-      </p:sp>
-      <p:sp>
-        <p:nvSpPr>
-          <p:cNvPr id="11" name="TextBox 10"/>
+              <a:t>Extinction Archive</a:t>
+            </a:r>
+          </a:p>
+          <a:p>
+            <a:pPr algn="l">
+              <a:spcBef>
+                <a:spcPts val="1400"/>
+              </a:spcBef>
+              <a:spcAft>
+                <a:spcPts val="600"/>
+              </a:spcAft>
+            </a:pPr>
+            <a:r>
+              <a:rPr sz="1200" b="0" i="0">
+                <a:solidFill>
+                  <a:srgbClr val="8A8372"/>
+                </a:solidFill>
+                <a:latin typeface="Microsoft YaHei"/>
+                <a:ea typeface="Microsoft YaHei"/>
+              </a:rPr>
+              <a:t>只留凭证编号和时间。档案本身也逐渐丢页，最终连「消失过」也被忘记。</a:t>
+            </a:r>
+          </a:p>
+        </p:txBody>
+      </p:sp>
+      <p:sp>
+        <p:nvSpPr>
+          <p:cNvPr id="12" name="TextBox 11"/>
           <p:cNvSpPr txBox="1"/>
           <p:nvPr/>
         </p:nvSpPr>
         <p:spPr>
           <a:xfrm>
-            <a:off x="10607040" y="6400800"/>
-            <a:ext cx="1097280" cy="365760"/>
+            <a:off x="548640" y="6400800"/>
+            <a:ext cx="7315200" cy="365760"/>
           </a:xfrm>
           <a:prstGeom prst="rect">
             <a:avLst/>
@@ -8955,7 +8935,7 @@
           </a:bodyPr>
           <a:lstStyle/>
           <a:p>
-            <a:pPr algn="r">
+            <a:pPr algn="l">
               <a:spcBef>
                 <a:spcPts val="0"/>
               </a:spcBef>
@@ -8966,12 +8946,55 @@
             <a:r>
               <a:rPr sz="900" b="0" i="0">
                 <a:solidFill>
-                  <a:srgbClr val="5A5A4A"/>
+                  <a:srgbClr val="5C564A"/>
                 </a:solidFill>
                 <a:latin typeface="Consolas"/>
                 <a:ea typeface="Consolas"/>
               </a:rPr>
-              <a:t>08</a:t>
+              <a:t>熵逝碑林 · Entropy Epitaph</a:t>
+            </a:r>
+          </a:p>
+        </p:txBody>
+      </p:sp>
+      <p:sp>
+        <p:nvSpPr>
+          <p:cNvPr id="13" name="TextBox 12"/>
+          <p:cNvSpPr txBox="1"/>
+          <p:nvPr/>
+        </p:nvSpPr>
+        <p:spPr>
+          <a:xfrm>
+            <a:off x="10607040" y="6400800"/>
+            <a:ext cx="1097280" cy="365760"/>
+          </a:xfrm>
+          <a:prstGeom prst="rect">
+            <a:avLst/>
+          </a:prstGeom>
+          <a:noFill/>
+        </p:spPr>
+        <p:txBody>
+          <a:bodyPr wrap="square" anchor="t" lIns="0" rIns="0" tIns="0" bIns="0">
+            <a:spAutoFit/>
+          </a:bodyPr>
+          <a:lstStyle/>
+          <a:p>
+            <a:pPr algn="r">
+              <a:spcBef>
+                <a:spcPts val="0"/>
+              </a:spcBef>
+              <a:spcAft>
+                <a:spcPts val="600"/>
+              </a:spcAft>
+            </a:pPr>
+            <a:r>
+              <a:rPr sz="900" b="0" i="0">
+                <a:solidFill>
+                  <a:srgbClr val="5C564A"/>
+                </a:solidFill>
+                <a:latin typeface="Consolas"/>
+                <a:ea typeface="Consolas"/>
+              </a:rPr>
+              <a:t>07</a:t>
             </a:r>
           </a:p>
         </p:txBody>
@@ -9009,7 +9032,7 @@
             <a:avLst/>
           </a:prstGeom>
           <a:solidFill>
-            <a:srgbClr val="121212"/>
+            <a:srgbClr val="100F0D"/>
           </a:solidFill>
           <a:ln>
             <a:noFill/>
@@ -9053,7 +9076,7 @@
             <a:avLst/>
           </a:prstGeom>
           <a:solidFill>
-            <a:srgbClr val="8A7A5A"/>
+            <a:srgbClr val="B89A63"/>
           </a:solidFill>
           <a:ln>
             <a:noFill/>
@@ -9115,12 +9138,12 @@
             <a:r>
               <a:rPr sz="1200" b="0" i="0">
                 <a:solidFill>
-                  <a:srgbClr val="8A7A5A"/>
+                  <a:srgbClr val="B89A63"/>
                 </a:solidFill>
                 <a:latin typeface="Consolas"/>
                 <a:ea typeface="Consolas"/>
               </a:rPr>
-              <a:t>08  DEMO · 演示数据与现场</a:t>
+              <a:t>08  ENGINEERING · 技术架构</a:t>
             </a:r>
           </a:p>
         </p:txBody>
@@ -9158,12 +9181,12 @@
             <a:r>
               <a:rPr sz="3000" b="1" i="0">
                 <a:solidFill>
-                  <a:srgbClr val="C8C8C0"/>
+                  <a:srgbClr val="D2CDBE"/>
                 </a:solidFill>
                 <a:latin typeface="Microsoft YaHei"/>
                 <a:ea typeface="Microsoft YaHei"/>
               </a:rPr>
-              <a:t>120 块碑，均衡覆盖，开箱即演</a:t>
+              <a:t>一套契约，两种运行模式</a:t>
             </a:r>
           </a:p>
           <a:p>
@@ -9178,12 +9201,12 @@
             <a:r>
               <a:rPr sz="1400" b="0" i="0">
                 <a:solidFill>
-                  <a:srgbClr val="7A7A70"/>
+                  <a:srgbClr val="8A8372"/>
                 </a:solidFill>
                 <a:latin typeface="Consolas"/>
                 <a:ea typeface="Consolas"/>
               </a:rPr>
-              <a:t>120 monuments, balanced coverage, ready to demo</a:t>
+              <a:t>One contract, two runtimes</a:t>
             </a:r>
           </a:p>
         </p:txBody>
@@ -9196,18 +9219,18 @@
         </p:nvSpPr>
         <p:spPr>
           <a:xfrm>
-            <a:off x="548640" y="2377440"/>
-            <a:ext cx="2066544" cy="1645920"/>
+            <a:off x="548640" y="2331720"/>
+            <a:ext cx="5394960" cy="3566160"/>
           </a:xfrm>
           <a:prstGeom prst="rect">
             <a:avLst/>
           </a:prstGeom>
           <a:solidFill>
-            <a:srgbClr val="1E1E1C"/>
+            <a:srgbClr val="1C1A16"/>
           </a:solidFill>
           <a:ln w="9525">
             <a:solidFill>
-              <a:srgbClr val="2A2A26"/>
+              <a:srgbClr val="3A3426"/>
             </a:solidFill>
           </a:ln>
           <a:effectLst/>
@@ -9242,8 +9265,8 @@
         </p:nvSpPr>
         <p:spPr>
           <a:xfrm>
-            <a:off x="548640" y="2651760"/>
-            <a:ext cx="2066544" cy="1188720"/>
+            <a:off x="868680" y="2560320"/>
+            <a:ext cx="4846320" cy="3200400"/>
           </a:xfrm>
           <a:prstGeom prst="rect">
             <a:avLst/>
@@ -9251,12 +9274,12 @@
           <a:noFill/>
         </p:spPr>
         <p:txBody>
-          <a:bodyPr wrap="square" anchor="ctr" lIns="0" rIns="0" tIns="0" bIns="0">
+          <a:bodyPr wrap="square" anchor="t" lIns="0" rIns="0" tIns="0" bIns="0">
             <a:spAutoFit/>
           </a:bodyPr>
           <a:lstStyle/>
           <a:p>
-            <a:pPr algn="ctr">
+            <a:pPr algn="l">
               <a:spcBef>
                 <a:spcPts val="0"/>
               </a:spcBef>
@@ -9265,34 +9288,114 @@
               </a:spcAft>
             </a:pPr>
             <a:r>
-              <a:rPr sz="3000" b="1" i="0">
-                <a:solidFill>
-                  <a:srgbClr val="8A7A5A"/>
+              <a:rPr sz="1600" b="1" i="0">
+                <a:solidFill>
+                  <a:srgbClr val="D2CDBE"/>
+                </a:solidFill>
+                <a:latin typeface="Microsoft YaHei"/>
+                <a:ea typeface="Microsoft YaHei"/>
+              </a:rPr>
+              <a:t>本地完整模式 · Local full stack</a:t>
+            </a:r>
+          </a:p>
+          <a:p>
+            <a:pPr algn="l">
+              <a:spcBef>
+                <a:spcPts val="700"/>
+              </a:spcBef>
+              <a:spcAft>
+                <a:spcPts val="600"/>
+              </a:spcAft>
+            </a:pPr>
+            <a:r>
+              <a:rPr sz="1200" b="0" i="0">
+                <a:solidFill>
+                  <a:srgbClr val="8A8372"/>
                 </a:solidFill>
                 <a:latin typeface="Consolas"/>
                 <a:ea typeface="Consolas"/>
               </a:rPr>
-              <a:t>120</a:t>
-            </a:r>
-          </a:p>
-          <a:p>
-            <a:pPr algn="ctr">
-              <a:spcBef>
-                <a:spcPts val="400"/>
-              </a:spcBef>
-              <a:spcAft>
-                <a:spcPts val="600"/>
-              </a:spcAft>
-            </a:pPr>
-            <a:r>
-              <a:rPr sz="1000" b="0" i="0">
-                <a:solidFill>
-                  <a:srgbClr val="7A7A70"/>
-                </a:solidFill>
-                <a:latin typeface="Microsoft YaHei"/>
-                <a:ea typeface="Microsoft YaHei"/>
-              </a:rPr>
-              <a:t>总墓碑 Monuments</a:t>
+              <a:t>·  FastAPI · SQLAlchemy async · SQLite</a:t>
+            </a:r>
+          </a:p>
+          <a:p>
+            <a:pPr algn="l">
+              <a:spcBef>
+                <a:spcPts val="700"/>
+              </a:spcBef>
+              <a:spcAft>
+                <a:spcPts val="600"/>
+              </a:spcAft>
+            </a:pPr>
+            <a:r>
+              <a:rPr sz="1200" b="0" i="0">
+                <a:solidFill>
+                  <a:srgbClr val="8A8372"/>
+                </a:solidFill>
+                <a:latin typeface="Consolas"/>
+                <a:ea typeface="Consolas"/>
+              </a:rPr>
+              <a:t>·  APScheduler 真实时间熵增引擎</a:t>
+            </a:r>
+          </a:p>
+          <a:p>
+            <a:pPr algn="l">
+              <a:spcBef>
+                <a:spcPts val="700"/>
+              </a:spcBef>
+              <a:spcAft>
+                <a:spcPts val="600"/>
+              </a:spcAft>
+            </a:pPr>
+            <a:r>
+              <a:rPr sz="1200" b="0" i="0">
+                <a:solidFill>
+                  <a:srgbClr val="8A8372"/>
+                </a:solidFill>
+                <a:latin typeface="Consolas"/>
+                <a:ea typeface="Consolas"/>
+              </a:rPr>
+              <a:t>·  OpenAI 五环节生成 + 离线 fallback</a:t>
+            </a:r>
+          </a:p>
+          <a:p>
+            <a:pPr algn="l">
+              <a:spcBef>
+                <a:spcPts val="700"/>
+              </a:spcBef>
+              <a:spcAft>
+                <a:spcPts val="600"/>
+              </a:spcAft>
+            </a:pPr>
+            <a:r>
+              <a:rPr sz="1200" b="0" i="0">
+                <a:solidFill>
+                  <a:srgbClr val="8A8372"/>
+                </a:solidFill>
+                <a:latin typeface="Consolas"/>
+                <a:ea typeface="Consolas"/>
+              </a:rPr>
+              <a:t>·  Wayback Machine 快照查询</a:t>
+            </a:r>
+          </a:p>
+          <a:p>
+            <a:pPr algn="l">
+              <a:spcBef>
+                <a:spcPts val="700"/>
+              </a:spcBef>
+              <a:spcAft>
+                <a:spcPts val="600"/>
+              </a:spcAft>
+            </a:pPr>
+            <a:r>
+              <a:rPr sz="1200" b="0" i="0">
+                <a:solidFill>
+                  <a:srgbClr val="8A8372"/>
+                </a:solidFill>
+                <a:latin typeface="Consolas"/>
+                <a:ea typeface="Consolas"/>
+              </a:rPr>
+              <a:t>·  SHA-256 唯一消逝凭证</a:t>
             </a:r>
           </a:p>
         </p:txBody>
@@ -9305,18 +9408,18 @@
         </p:nvSpPr>
         <p:spPr>
           <a:xfrm>
-            <a:off x="2798064" y="2377440"/>
-            <a:ext cx="2066544" cy="1645920"/>
+            <a:off x="6217920" y="2331720"/>
+            <a:ext cx="5394960" cy="3566160"/>
           </a:xfrm>
           <a:prstGeom prst="rect">
             <a:avLst/>
           </a:prstGeom>
           <a:solidFill>
-            <a:srgbClr val="1E1E1C"/>
+            <a:srgbClr val="1C1A16"/>
           </a:solidFill>
           <a:ln w="9525">
             <a:solidFill>
-              <a:srgbClr val="2A2A26"/>
+              <a:srgbClr val="B89A63"/>
             </a:solidFill>
           </a:ln>
           <a:effectLst/>
@@ -9351,398 +9454,8 @@
         </p:nvSpPr>
         <p:spPr>
           <a:xfrm>
-            <a:off x="2798064" y="2651760"/>
-            <a:ext cx="2066544" cy="1188720"/>
-          </a:xfrm>
-          <a:prstGeom prst="rect">
-            <a:avLst/>
-          </a:prstGeom>
-          <a:noFill/>
-        </p:spPr>
-        <p:txBody>
-          <a:bodyPr wrap="square" anchor="ctr" lIns="0" rIns="0" tIns="0" bIns="0">
-            <a:spAutoFit/>
-          </a:bodyPr>
-          <a:lstStyle/>
-          <a:p>
-            <a:pPr algn="ctr">
-              <a:spcBef>
-                <a:spcPts val="0"/>
-              </a:spcBef>
-              <a:spcAft>
-                <a:spcPts val="600"/>
-              </a:spcAft>
-            </a:pPr>
-            <a:r>
-              <a:rPr sz="3000" b="1" i="0">
-                <a:solidFill>
-                  <a:srgbClr val="8A7A5A"/>
-                </a:solidFill>
-                <a:latin typeface="Consolas"/>
-                <a:ea typeface="Consolas"/>
-              </a:rPr>
-              <a:t>4</a:t>
-            </a:r>
-          </a:p>
-          <a:p>
-            <a:pPr algn="ctr">
-              <a:spcBef>
-                <a:spcPts val="400"/>
-              </a:spcBef>
-              <a:spcAft>
-                <a:spcPts val="600"/>
-              </a:spcAft>
-            </a:pPr>
-            <a:r>
-              <a:rPr sz="1000" b="0" i="0">
-                <a:solidFill>
-                  <a:srgbClr val="7A7A70"/>
-                </a:solidFill>
-                <a:latin typeface="Microsoft YaHei"/>
-                <a:ea typeface="Microsoft YaHei"/>
-              </a:rPr>
-              <a:t>类型 × 30 Types</a:t>
-            </a:r>
-          </a:p>
-        </p:txBody>
-      </p:sp>
-      <p:sp>
-        <p:nvSpPr>
-          <p:cNvPr id="10" name="Rectangle 9"/>
-          <p:cNvSpPr/>
-          <p:nvPr/>
-        </p:nvSpPr>
-        <p:spPr>
-          <a:xfrm>
-            <a:off x="5047488" y="2377440"/>
-            <a:ext cx="2066544" cy="1645920"/>
-          </a:xfrm>
-          <a:prstGeom prst="rect">
-            <a:avLst/>
-          </a:prstGeom>
-          <a:solidFill>
-            <a:srgbClr val="1E1E1C"/>
-          </a:solidFill>
-          <a:ln w="9525">
-            <a:solidFill>
-              <a:srgbClr val="2A2A26"/>
-            </a:solidFill>
-          </a:ln>
-          <a:effectLst/>
-        </p:spPr>
-        <p:style>
-          <a:lnRef idx="1">
-            <a:schemeClr val="accent1"/>
-          </a:lnRef>
-          <a:fillRef idx="3">
-            <a:schemeClr val="accent1"/>
-          </a:fillRef>
-          <a:effectRef idx="2">
-            <a:schemeClr val="accent1"/>
-          </a:effectRef>
-          <a:fontRef idx="minor">
-            <a:schemeClr val="lt1"/>
-          </a:fontRef>
-        </p:style>
-        <p:txBody>
-          <a:bodyPr rtlCol="0" anchor="ctr"/>
-          <a:lstStyle/>
-          <a:p>
-            <a:pPr algn="ctr"/>
-          </a:p>
-        </p:txBody>
-      </p:sp>
-      <p:sp>
-        <p:nvSpPr>
-          <p:cNvPr id="11" name="TextBox 10"/>
-          <p:cNvSpPr txBox="1"/>
-          <p:nvPr/>
-        </p:nvSpPr>
-        <p:spPr>
-          <a:xfrm>
-            <a:off x="5047488" y="2651760"/>
-            <a:ext cx="2066544" cy="1188720"/>
-          </a:xfrm>
-          <a:prstGeom prst="rect">
-            <a:avLst/>
-          </a:prstGeom>
-          <a:noFill/>
-        </p:spPr>
-        <p:txBody>
-          <a:bodyPr wrap="square" anchor="ctr" lIns="0" rIns="0" tIns="0" bIns="0">
-            <a:spAutoFit/>
-          </a:bodyPr>
-          <a:lstStyle/>
-          <a:p>
-            <a:pPr algn="ctr">
-              <a:spcBef>
-                <a:spcPts val="0"/>
-              </a:spcBef>
-              <a:spcAft>
-                <a:spcPts val="600"/>
-              </a:spcAft>
-            </a:pPr>
-            <a:r>
-              <a:rPr sz="3000" b="1" i="0">
-                <a:solidFill>
-                  <a:srgbClr val="8A7A5A"/>
-                </a:solidFill>
-                <a:latin typeface="Consolas"/>
-                <a:ea typeface="Consolas"/>
-              </a:rPr>
-              <a:t>5</a:t>
-            </a:r>
-          </a:p>
-          <a:p>
-            <a:pPr algn="ctr">
-              <a:spcBef>
-                <a:spcPts val="400"/>
-              </a:spcBef>
-              <a:spcAft>
-                <a:spcPts val="600"/>
-              </a:spcAft>
-            </a:pPr>
-            <a:r>
-              <a:rPr sz="1000" b="0" i="0">
-                <a:solidFill>
-                  <a:srgbClr val="7A7A70"/>
-                </a:solidFill>
-                <a:latin typeface="Microsoft YaHei"/>
-                <a:ea typeface="Microsoft YaHei"/>
-              </a:rPr>
-              <a:t>阶段 × 24 Stages</a:t>
-            </a:r>
-          </a:p>
-        </p:txBody>
-      </p:sp>
-      <p:sp>
-        <p:nvSpPr>
-          <p:cNvPr id="12" name="Rectangle 11"/>
-          <p:cNvSpPr/>
-          <p:nvPr/>
-        </p:nvSpPr>
-        <p:spPr>
-          <a:xfrm>
-            <a:off x="7296912" y="2377440"/>
-            <a:ext cx="2066544" cy="1645920"/>
-          </a:xfrm>
-          <a:prstGeom prst="rect">
-            <a:avLst/>
-          </a:prstGeom>
-          <a:solidFill>
-            <a:srgbClr val="1E1E1C"/>
-          </a:solidFill>
-          <a:ln w="9525">
-            <a:solidFill>
-              <a:srgbClr val="2A2A26"/>
-            </a:solidFill>
-          </a:ln>
-          <a:effectLst/>
-        </p:spPr>
-        <p:style>
-          <a:lnRef idx="1">
-            <a:schemeClr val="accent1"/>
-          </a:lnRef>
-          <a:fillRef idx="3">
-            <a:schemeClr val="accent1"/>
-          </a:fillRef>
-          <a:effectRef idx="2">
-            <a:schemeClr val="accent1"/>
-          </a:effectRef>
-          <a:fontRef idx="minor">
-            <a:schemeClr val="lt1"/>
-          </a:fontRef>
-        </p:style>
-        <p:txBody>
-          <a:bodyPr rtlCol="0" anchor="ctr"/>
-          <a:lstStyle/>
-          <a:p>
-            <a:pPr algn="ctr"/>
-          </a:p>
-        </p:txBody>
-      </p:sp>
-      <p:sp>
-        <p:nvSpPr>
-          <p:cNvPr id="13" name="TextBox 12"/>
-          <p:cNvSpPr txBox="1"/>
-          <p:nvPr/>
-        </p:nvSpPr>
-        <p:spPr>
-          <a:xfrm>
-            <a:off x="7296912" y="2651760"/>
-            <a:ext cx="2066544" cy="1188720"/>
-          </a:xfrm>
-          <a:prstGeom prst="rect">
-            <a:avLst/>
-          </a:prstGeom>
-          <a:noFill/>
-        </p:spPr>
-        <p:txBody>
-          <a:bodyPr wrap="square" anchor="ctr" lIns="0" rIns="0" tIns="0" bIns="0">
-            <a:spAutoFit/>
-          </a:bodyPr>
-          <a:lstStyle/>
-          <a:p>
-            <a:pPr algn="ctr">
-              <a:spcBef>
-                <a:spcPts val="0"/>
-              </a:spcBef>
-              <a:spcAft>
-                <a:spcPts val="600"/>
-              </a:spcAft>
-            </a:pPr>
-            <a:r>
-              <a:rPr sz="3000" b="1" i="0">
-                <a:solidFill>
-                  <a:srgbClr val="8A7A5A"/>
-                </a:solidFill>
-                <a:latin typeface="Consolas"/>
-                <a:ea typeface="Consolas"/>
-              </a:rPr>
-              <a:t>3</a:t>
-            </a:r>
-          </a:p>
-          <a:p>
-            <a:pPr algn="ctr">
-              <a:spcBef>
-                <a:spcPts val="400"/>
-              </a:spcBef>
-              <a:spcAft>
-                <a:spcPts val="600"/>
-              </a:spcAft>
-            </a:pPr>
-            <a:r>
-              <a:rPr sz="1000" b="0" i="0">
-                <a:solidFill>
-                  <a:srgbClr val="7A7A70"/>
-                </a:solidFill>
-                <a:latin typeface="Microsoft YaHei"/>
-                <a:ea typeface="Microsoft YaHei"/>
-              </a:rPr>
-              <a:t>风格 × 40 Styles</a:t>
-            </a:r>
-          </a:p>
-        </p:txBody>
-      </p:sp>
-      <p:sp>
-        <p:nvSpPr>
-          <p:cNvPr id="14" name="Rectangle 13"/>
-          <p:cNvSpPr/>
-          <p:nvPr/>
-        </p:nvSpPr>
-        <p:spPr>
-          <a:xfrm>
-            <a:off x="9546336" y="2377440"/>
-            <a:ext cx="2066544" cy="1645920"/>
-          </a:xfrm>
-          <a:prstGeom prst="rect">
-            <a:avLst/>
-          </a:prstGeom>
-          <a:solidFill>
-            <a:srgbClr val="1E1E1C"/>
-          </a:solidFill>
-          <a:ln w="9525">
-            <a:solidFill>
-              <a:srgbClr val="2A2A26"/>
-            </a:solidFill>
-          </a:ln>
-          <a:effectLst/>
-        </p:spPr>
-        <p:style>
-          <a:lnRef idx="1">
-            <a:schemeClr val="accent1"/>
-          </a:lnRef>
-          <a:fillRef idx="3">
-            <a:schemeClr val="accent1"/>
-          </a:fillRef>
-          <a:effectRef idx="2">
-            <a:schemeClr val="accent1"/>
-          </a:effectRef>
-          <a:fontRef idx="minor">
-            <a:schemeClr val="lt1"/>
-          </a:fontRef>
-        </p:style>
-        <p:txBody>
-          <a:bodyPr rtlCol="0" anchor="ctr"/>
-          <a:lstStyle/>
-          <a:p>
-            <a:pPr algn="ctr"/>
-          </a:p>
-        </p:txBody>
-      </p:sp>
-      <p:sp>
-        <p:nvSpPr>
-          <p:cNvPr id="15" name="TextBox 14"/>
-          <p:cNvSpPr txBox="1"/>
-          <p:nvPr/>
-        </p:nvSpPr>
-        <p:spPr>
-          <a:xfrm>
-            <a:off x="9546336" y="2651760"/>
-            <a:ext cx="2066544" cy="1188720"/>
-          </a:xfrm>
-          <a:prstGeom prst="rect">
-            <a:avLst/>
-          </a:prstGeom>
-          <a:noFill/>
-        </p:spPr>
-        <p:txBody>
-          <a:bodyPr wrap="square" anchor="ctr" lIns="0" rIns="0" tIns="0" bIns="0">
-            <a:spAutoFit/>
-          </a:bodyPr>
-          <a:lstStyle/>
-          <a:p>
-            <a:pPr algn="ctr">
-              <a:spcBef>
-                <a:spcPts val="0"/>
-              </a:spcBef>
-              <a:spcAft>
-                <a:spcPts val="600"/>
-              </a:spcAft>
-            </a:pPr>
-            <a:r>
-              <a:rPr sz="3000" b="1" i="0">
-                <a:solidFill>
-                  <a:srgbClr val="8A7A5A"/>
-                </a:solidFill>
-                <a:latin typeface="Consolas"/>
-                <a:ea typeface="Consolas"/>
-              </a:rPr>
-              <a:t>12</a:t>
-            </a:r>
-          </a:p>
-          <a:p>
-            <a:pPr algn="ctr">
-              <a:spcBef>
-                <a:spcPts val="400"/>
-              </a:spcBef>
-              <a:spcAft>
-                <a:spcPts val="600"/>
-              </a:spcAft>
-            </a:pPr>
-            <a:r>
-              <a:rPr sz="1000" b="0" i="0">
-                <a:solidFill>
-                  <a:srgbClr val="7A7A70"/>
-                </a:solidFill>
-                <a:latin typeface="Microsoft YaHei"/>
-                <a:ea typeface="Microsoft YaHei"/>
-              </a:rPr>
-              <a:t>消逝凭证 Certs</a:t>
-            </a:r>
-          </a:p>
-        </p:txBody>
-      </p:sp>
-      <p:sp>
-        <p:nvSpPr>
-          <p:cNvPr id="16" name="TextBox 15"/>
-          <p:cNvSpPr txBox="1"/>
-          <p:nvPr/>
-        </p:nvSpPr>
-        <p:spPr>
-          <a:xfrm>
-            <a:off x="548640" y="4480560"/>
-            <a:ext cx="11064240" cy="1645920"/>
+            <a:off x="6537960" y="2560320"/>
+            <a:ext cx="4846320" cy="3200400"/>
           </a:xfrm>
           <a:prstGeom prst="rect">
             <a:avLst/>
@@ -9764,20 +9477,20 @@
               </a:spcAft>
             </a:pPr>
             <a:r>
-              <a:rPr sz="1400" b="1" i="0">
-                <a:solidFill>
-                  <a:srgbClr val="C8C8C0"/>
+              <a:rPr sz="1600" b="1" i="0">
+                <a:solidFill>
+                  <a:srgbClr val="D2CDBE"/>
                 </a:solidFill>
                 <a:latin typeface="Microsoft YaHei"/>
                 <a:ea typeface="Microsoft YaHei"/>
               </a:rPr>
-              <a:t>5 分钟现场路径:</a:t>
-            </a:r>
-          </a:p>
-          <a:p>
-            <a:pPr algn="l">
-              <a:spcBef>
-                <a:spcPts val="800"/>
+              <a:t>GitHub Pages 静态模式</a:t>
+            </a:r>
+          </a:p>
+          <a:p>
+            <a:pPr algn="l">
+              <a:spcBef>
+                <a:spcPts val="700"/>
               </a:spcBef>
               <a:spcAft>
                 <a:spcPts val="600"/>
@@ -9786,39 +9499,99 @@
             <a:r>
               <a:rPr sz="1200" b="0" i="0">
                 <a:solidFill>
-                  <a:srgbClr val="7A7A70"/>
-                </a:solidFill>
-                <a:latin typeface="Microsoft YaHei"/>
-                <a:ea typeface="Microsoft YaHei"/>
-              </a:rPr>
-              <a:t>落地页抛主张 → 浏览 120 块不同阶段的碑 → 立一块遗物碑 → 开 ×720 演示模式看风化 → 擦拭高熵碑 → 见证崩塌与凭证 → 无名墓区凭吊 → 查看逐渐丢页的档案</a:t>
-            </a:r>
-          </a:p>
-          <a:p>
-            <a:pPr algn="l">
-              <a:spcBef>
-                <a:spcPts val="1000"/>
-              </a:spcBef>
-              <a:spcAft>
-                <a:spcPts val="600"/>
-              </a:spcAft>
-            </a:pPr>
-            <a:r>
-              <a:rPr sz="1200" b="0" i="0">
-                <a:solidFill>
-                  <a:srgbClr val="00C83A"/>
+                  <a:srgbClr val="8A8372"/>
                 </a:solidFill>
                 <a:latin typeface="Consolas"/>
                 <a:ea typeface="Consolas"/>
               </a:rPr>
-              <a:t>Live:  h0ll0w-akuzr0guy.github.io/entropy-epitaph</a:t>
-            </a:r>
-          </a:p>
-        </p:txBody>
-      </p:sp>
-      <p:sp>
-        <p:nvSpPr>
-          <p:cNvPr id="17" name="TextBox 16"/>
+              <a:t>·  Vanilla JS + Vite 静态托管</a:t>
+            </a:r>
+          </a:p>
+          <a:p>
+            <a:pPr algn="l">
+              <a:spcBef>
+                <a:spcPts val="700"/>
+              </a:spcBef>
+              <a:spcAft>
+                <a:spcPts val="600"/>
+              </a:spcAft>
+            </a:pPr>
+            <a:r>
+              <a:rPr sz="1200" b="0" i="0">
+                <a:solidFill>
+                  <a:srgbClr val="8A8372"/>
+                </a:solidFill>
+                <a:latin typeface="Consolas"/>
+                <a:ea typeface="Consolas"/>
+              </a:rPr>
+              <a:t>·  同一 API 契约的浏览器适配层</a:t>
+            </a:r>
+          </a:p>
+          <a:p>
+            <a:pPr algn="l">
+              <a:spcBef>
+                <a:spcPts val="700"/>
+              </a:spcBef>
+              <a:spcAft>
+                <a:spcPts val="600"/>
+              </a:spcAft>
+            </a:pPr>
+            <a:r>
+              <a:rPr sz="1200" b="0" i="0">
+                <a:solidFill>
+                  <a:srgbClr val="8A8372"/>
+                </a:solidFill>
+                <a:latin typeface="Consolas"/>
+                <a:ea typeface="Consolas"/>
+              </a:rPr>
+              <a:t>·  localStorage 持久化访客操作</a:t>
+            </a:r>
+          </a:p>
+          <a:p>
+            <a:pPr algn="l">
+              <a:spcBef>
+                <a:spcPts val="700"/>
+              </a:spcBef>
+              <a:spcAft>
+                <a:spcPts val="600"/>
+              </a:spcAft>
+            </a:pPr>
+            <a:r>
+              <a:rPr sz="1200" b="0" i="0">
+                <a:solidFill>
+                  <a:srgbClr val="8A8372"/>
+                </a:solidFill>
+                <a:latin typeface="Consolas"/>
+                <a:ea typeface="Consolas"/>
+              </a:rPr>
+              <a:t>·  125 条可复现演示数据 fixture</a:t>
+            </a:r>
+          </a:p>
+          <a:p>
+            <a:pPr algn="l">
+              <a:spcBef>
+                <a:spcPts val="700"/>
+              </a:spcBef>
+              <a:spcAft>
+                <a:spcPts val="600"/>
+              </a:spcAft>
+            </a:pPr>
+            <a:r>
+              <a:rPr sz="1200" b="0" i="0">
+                <a:solidFill>
+                  <a:srgbClr val="8A8372"/>
+                </a:solidFill>
+                <a:latin typeface="Consolas"/>
+                <a:ea typeface="Consolas"/>
+              </a:rPr>
+              <a:t>·  CI + Pages 自动部署</a:t>
+            </a:r>
+          </a:p>
+        </p:txBody>
+      </p:sp>
+      <p:sp>
+        <p:nvSpPr>
+          <p:cNvPr id="10" name="TextBox 9"/>
           <p:cNvSpPr txBox="1"/>
           <p:nvPr/>
         </p:nvSpPr>
@@ -9849,7 +9622,7 @@
             <a:r>
               <a:rPr sz="900" b="0" i="0">
                 <a:solidFill>
-                  <a:srgbClr val="5A5A4A"/>
+                  <a:srgbClr val="5C564A"/>
                 </a:solidFill>
                 <a:latin typeface="Consolas"/>
                 <a:ea typeface="Consolas"/>
@@ -9861,7 +9634,7 @@
       </p:sp>
       <p:sp>
         <p:nvSpPr>
-          <p:cNvPr id="18" name="TextBox 17"/>
+          <p:cNvPr id="11" name="TextBox 10"/>
           <p:cNvSpPr txBox="1"/>
           <p:nvPr/>
         </p:nvSpPr>
@@ -9892,7 +9665,7 @@
             <a:r>
               <a:rPr sz="900" b="0" i="0">
                 <a:solidFill>
-                  <a:srgbClr val="5A5A4A"/>
+                  <a:srgbClr val="5C564A"/>
                 </a:solidFill>
                 <a:latin typeface="Consolas"/>
                 <a:ea typeface="Consolas"/>
